--- a/pptx/final-pptx-v2.pptx
+++ b/pptx/final-pptx-v2.pptx
@@ -4643,7 +4643,7 @@
                 <a:ea typeface="Roboto"/>
                 <a:cs typeface="Roboto"/>
               </a:rPr>
-              <a:t>  GPT-2 (2019):       ~3 МБ весов</a:t>
+              <a:t>  BERT Base (2018):    ~0,22 ГБ весов</a:t>
             </a:r>
           </a:p>
           <a:p>
@@ -4662,7 +4662,7 @@
                 <a:ea typeface="Roboto"/>
                 <a:cs typeface="Roboto"/>
               </a:rPr>
-              <a:t>  GPT-3 (2020):       ~350 ГБ весов</a:t>
+              <a:t>  GPT-3 (2020):        ~350 ГБ весов</a:t>
             </a:r>
           </a:p>
           <a:p>
@@ -4681,7 +4681,7 @@
                 <a:ea typeface="Roboto"/>
                 <a:cs typeface="Roboto"/>
               </a:rPr>
-              <a:t>  LLaMA 3 70B (2024): ~140 ГБ весов</a:t>
+              <a:t>  DeepSeek V2 (2024):  ~472 ГБ весов</a:t>
             </a:r>
           </a:p>
           <a:p>
@@ -4700,7 +4700,26 @@
                 <a:ea typeface="Roboto"/>
                 <a:cs typeface="Roboto"/>
               </a:rPr>
-              <a:t>  Falcon 180B (2023): ~360 ГБ весов</a:t>
+              <a:t>  GLM-4.5 (2025):      ~717 ГБ весов</a:t>
+            </a:r>
+          </a:p>
+          <a:p>
+            <a:pPr algn="l" indent="0" marL="0">
+              <a:buNone/>
+              <a:spcBef>
+                <a:spcPts val="0"/>
+              </a:spcBef>
+              <a:spcAft>
+                <a:spcPts val="0"/>
+              </a:spcAft>
+            </a:pPr>
+            <a:r>
+              <a:rPr lang="ru-RU" sz="1550">
+                <a:latin typeface="Roboto"/>
+                <a:ea typeface="Roboto"/>
+                <a:cs typeface="Roboto"/>
+              </a:rPr>
+              <a:t>  DeepSeek V4 Pro (2026): ~1,72 ТБ</a:t>
             </a:r>
           </a:p>
           <a:p>

--- a/pptx/final-pptx-v2.pptx
+++ b/pptx/final-pptx-v2.pptx
@@ -3186,9 +3186,9 @@
                 <a:solidFill>
                   <a:srgbClr val="424242"/>
                 </a:solidFill>
-                <a:latin typeface="Roboto"/>
-                <a:ea typeface="Roboto"/>
-                <a:cs typeface="Roboto"/>
+                <a:latin typeface="Times New Roman"/>
+                <a:ea typeface="Times New Roman"/>
+                <a:cs typeface="Times New Roman"/>
               </a:rPr>
               <a:t>МАИ</a:t>
             </a:r>
@@ -3231,9 +3231,9 @@
                 <a:solidFill>
                   <a:srgbClr val="424242"/>
                 </a:solidFill>
-                <a:latin typeface="Roboto"/>
-                <a:ea typeface="Roboto"/>
-                <a:cs typeface="Roboto"/>
+                <a:latin typeface="Times New Roman"/>
+                <a:ea typeface="Times New Roman"/>
+                <a:cs typeface="Times New Roman"/>
               </a:rPr>
               <a:t>МОСКОВСКИЙ АВИАЦИОННЫЙ ИНСТИТУТ (НИУ)  ·  Институт №8  ·  Кафедра 806</a:t>
             </a:r>
@@ -3276,9 +3276,9 @@
                 <a:solidFill>
                   <a:srgbClr val="424242"/>
                 </a:solidFill>
-                <a:latin typeface="Roboto"/>
-                <a:ea typeface="Roboto"/>
-                <a:cs typeface="Roboto"/>
+                <a:latin typeface="Times New Roman"/>
+                <a:ea typeface="Times New Roman"/>
+                <a:cs typeface="Times New Roman"/>
               </a:rPr>
               <a:t>Выпускная квалификационная работа магистра на тему:</a:t>
             </a:r>
@@ -3306,9 +3306,9 @@
             </a:pPr>
             <a:r>
               <a:rPr lang="ru-RU" sz="2200" b="1">
-                <a:latin typeface="Roboto"/>
-                <a:ea typeface="Roboto"/>
-                <a:cs typeface="Roboto"/>
+                <a:latin typeface="Times New Roman"/>
+                <a:ea typeface="Times New Roman"/>
+                <a:cs typeface="Times New Roman"/>
               </a:rPr>
               <a:t>Оптимизация холодного старта и масштабирования
 моделей машинного обучения в бессерверном инференсе
@@ -3350,9 +3350,9 @@
             </a:pPr>
             <a:r>
               <a:rPr lang="ru-RU" sz="1600">
-                <a:latin typeface="Roboto"/>
-                <a:ea typeface="Roboto"/>
-                <a:cs typeface="Roboto"/>
+                <a:latin typeface="Times New Roman"/>
+                <a:ea typeface="Times New Roman"/>
+                <a:cs typeface="Times New Roman"/>
               </a:rPr>
               <a:t>Студент группы М8О-209СВ-24:  Блинов Максим Алексеевич</a:t>
             </a:r>
@@ -3369,9 +3369,9 @@
             </a:pPr>
             <a:r>
               <a:rPr lang="ru-RU" sz="1600">
-                <a:latin typeface="Roboto"/>
-                <a:ea typeface="Roboto"/>
-                <a:cs typeface="Roboto"/>
+                <a:latin typeface="Times New Roman"/>
+                <a:ea typeface="Times New Roman"/>
+                <a:cs typeface="Times New Roman"/>
               </a:rPr>
               <a:t>Научный руководитель:  Булакина Мария Борисовна, к.т.н., доцент, доцент каф. 806</a:t>
             </a:r>
@@ -3402,9 +3402,9 @@
                 <a:solidFill>
                   <a:srgbClr val="424242"/>
                 </a:solidFill>
-                <a:latin typeface="Roboto"/>
-                <a:ea typeface="Roboto"/>
-                <a:cs typeface="Roboto"/>
+                <a:latin typeface="Times New Roman"/>
+                <a:ea typeface="Times New Roman"/>
+                <a:cs typeface="Times New Roman"/>
               </a:rPr>
               <a:t>Направление:  02.04.02 Фундаментальная информатика и информационные технологии</a:t>
             </a:r>
@@ -3444,9 +3444,9 @@
             </a:pPr>
             <a:r>
               <a:rPr lang="ru-RU" sz="1200">
-                <a:latin typeface="Roboto"/>
-                <a:ea typeface="Roboto"/>
-                <a:cs typeface="Roboto"/>
+                <a:latin typeface="Times New Roman"/>
+                <a:ea typeface="Times New Roman"/>
+                <a:cs typeface="Times New Roman"/>
               </a:rPr>
               <a:t>Москва 2025</a:t>
             </a:r>
@@ -3512,9 +3512,9 @@
             </a:pPr>
             <a:r>
               <a:rPr lang="ru-RU" sz="2800" b="1">
-                <a:latin typeface="Roboto"/>
-                <a:ea typeface="Roboto"/>
-                <a:cs typeface="Roboto"/>
+                <a:latin typeface="Times New Roman"/>
+                <a:ea typeface="Times New Roman"/>
+                <a:cs typeface="Times New Roman"/>
               </a:rPr>
               <a:t>Анализ надёжности</a:t>
             </a:r>
@@ -3554,9 +3554,9 @@
             </a:pPr>
             <a:r>
               <a:rPr lang="ru-RU" sz="1600" b="1">
-                <a:latin typeface="Roboto"/>
-                <a:ea typeface="Roboto"/>
-                <a:cs typeface="Roboto"/>
+                <a:latin typeface="Times New Roman"/>
+                <a:ea typeface="Times New Roman"/>
+                <a:cs typeface="Times New Roman"/>
               </a:rPr>
               <a:t>Сценарий 1: Отказ worker-ноды</a:t>
             </a:r>
@@ -3573,9 +3573,9 @@
             </a:pPr>
             <a:r>
               <a:rPr lang="ru-RU" sz="1380">
-                <a:latin typeface="Roboto"/>
-                <a:ea typeface="Roboto"/>
-                <a:cs typeface="Roboto"/>
+                <a:latin typeface="Times New Roman"/>
+                <a:ea typeface="Times New Roman"/>
+                <a:cs typeface="Times New Roman"/>
               </a:rPr>
               <a:t>  TTL в Redis истекает через 30 с → автоочистка.</a:t>
             </a:r>
@@ -3592,9 +3592,9 @@
             </a:pPr>
             <a:r>
               <a:rPr lang="ru-RU" sz="1380">
-                <a:latin typeface="Roboto"/>
-                <a:ea typeface="Roboto"/>
-                <a:cs typeface="Roboto"/>
+                <a:latin typeface="Times New Roman"/>
+                <a:ea typeface="Times New Roman"/>
+                <a:cs typeface="Times New Roman"/>
               </a:rPr>
               <a:t>  r = 2: P(потери) = 10⁻⁴;   r = 3: P = 10⁻⁶</a:t>
             </a:r>
@@ -3614,9 +3614,9 @@
                 <a:solidFill>
                   <a:srgbClr val="158158"/>
                 </a:solidFill>
-                <a:latin typeface="Roboto"/>
-                <a:ea typeface="Roboto"/>
-                <a:cs typeface="Roboto"/>
+                <a:latin typeface="Times New Roman"/>
+                <a:ea typeface="Times New Roman"/>
+                <a:cs typeface="Times New Roman"/>
               </a:rPr>
               <a:t>  → деградация к HF fallback, не остановка</a:t>
             </a:r>
@@ -3644,9 +3644,9 @@
             </a:pPr>
             <a:r>
               <a:rPr lang="ru-RU" sz="1600" b="1">
-                <a:latin typeface="Roboto"/>
-                <a:ea typeface="Roboto"/>
-                <a:cs typeface="Roboto"/>
+                <a:latin typeface="Times New Roman"/>
+                <a:ea typeface="Times New Roman"/>
+                <a:cs typeface="Times New Roman"/>
               </a:rPr>
               <a:t>Сценарий 2: Недоступность Redis</a:t>
             </a:r>
@@ -3663,9 +3663,9 @@
             </a:pPr>
             <a:r>
               <a:rPr lang="ru-RU" sz="1380">
-                <a:latin typeface="Roboto"/>
-                <a:ea typeface="Roboto"/>
-                <a:cs typeface="Roboto"/>
+                <a:latin typeface="Times New Roman"/>
+                <a:ea typeface="Times New Roman"/>
+                <a:cs typeface="Times New Roman"/>
               </a:rPr>
               <a:t>  Агент теряет peer discovery.</a:t>
             </a:r>
@@ -3682,9 +3682,9 @@
             </a:pPr>
             <a:r>
               <a:rPr lang="ru-RU" sz="1380">
-                <a:latin typeface="Roboto"/>
-                <a:ea typeface="Roboto"/>
-                <a:cs typeface="Roboto"/>
+                <a:latin typeface="Times New Roman"/>
+                <a:ea typeface="Times New Roman"/>
+                <a:cs typeface="Times New Roman"/>
               </a:rPr>
               <a:t>  Работает: local cache → HuggingFace (без P2P).</a:t>
             </a:r>
@@ -3704,9 +3704,9 @@
                 <a:solidFill>
                   <a:srgbClr val="158158"/>
                 </a:solidFill>
-                <a:latin typeface="Roboto"/>
-                <a:ea typeface="Roboto"/>
-                <a:cs typeface="Roboto"/>
+                <a:latin typeface="Times New Roman"/>
+                <a:ea typeface="Times New Roman"/>
+                <a:cs typeface="Times New Roman"/>
               </a:rPr>
               <a:t>  → сервис работает при наличии local кэша</a:t>
             </a:r>
@@ -3734,9 +3734,9 @@
             </a:pPr>
             <a:r>
               <a:rPr lang="ru-RU" sz="1600" b="1">
-                <a:latin typeface="Roboto"/>
-                <a:ea typeface="Roboto"/>
-                <a:cs typeface="Roboto"/>
+                <a:latin typeface="Times New Roman"/>
+                <a:ea typeface="Times New Roman"/>
+                <a:cs typeface="Times New Roman"/>
               </a:rPr>
               <a:t>Сценарий 3: Недоступность HuggingFace Hub</a:t>
             </a:r>
@@ -3753,9 +3753,9 @@
             </a:pPr>
             <a:r>
               <a:rPr lang="ru-RU" sz="1380">
-                <a:latin typeface="Roboto"/>
-                <a:ea typeface="Roboto"/>
-                <a:cs typeface="Roboto"/>
+                <a:latin typeface="Times New Roman"/>
+                <a:ea typeface="Times New Roman"/>
+                <a:cs typeface="Times New Roman"/>
               </a:rPr>
               <a:t>  Прогретый кластер полностью автономен.</a:t>
             </a:r>
@@ -3772,9 +3772,9 @@
             </a:pPr>
             <a:r>
               <a:rPr lang="ru-RU" sz="1380">
-                <a:latin typeface="Roboto"/>
-                <a:ea typeface="Roboto"/>
-                <a:cs typeface="Roboto"/>
+                <a:latin typeface="Times New Roman"/>
+                <a:ea typeface="Times New Roman"/>
+                <a:cs typeface="Times New Roman"/>
               </a:rPr>
               <a:t>  NFS: отказ сервера = полная остановка.</a:t>
             </a:r>
@@ -3794,9 +3794,9 @@
                 <a:solidFill>
                   <a:srgbClr val="158158"/>
                 </a:solidFill>
-                <a:latin typeface="Roboto"/>
-                <a:ea typeface="Roboto"/>
-                <a:cs typeface="Roboto"/>
+                <a:latin typeface="Times New Roman"/>
+                <a:ea typeface="Times New Roman"/>
+                <a:cs typeface="Times New Roman"/>
               </a:rPr>
               <a:t>  P2P/FUSE → graceful degradation</a:t>
             </a:r>
@@ -3910,9 +3910,9 @@
             </a:pPr>
             <a:r>
               <a:rPr lang="ru-RU" sz="2800" b="1">
-                <a:latin typeface="Roboto"/>
-                <a:ea typeface="Roboto"/>
-                <a:cs typeface="Roboto"/>
+                <a:latin typeface="Times New Roman"/>
+                <a:ea typeface="Times New Roman"/>
+                <a:cs typeface="Times New Roman"/>
               </a:rPr>
               <a:t>Итоги работы</a:t>
             </a:r>
@@ -3952,9 +3952,9 @@
             </a:pPr>
             <a:r>
               <a:rPr lang="ru-RU" sz="1800" b="1">
-                <a:latin typeface="Roboto"/>
-                <a:ea typeface="Roboto"/>
-                <a:cs typeface="Roboto"/>
+                <a:latin typeface="Times New Roman"/>
+                <a:ea typeface="Times New Roman"/>
+                <a:cs typeface="Times New Roman"/>
               </a:rPr>
               <a:t>Выполненные задачи:</a:t>
             </a:r>
@@ -3982,9 +3982,9 @@
             </a:pPr>
             <a:r>
               <a:rPr lang="ru-RU" sz="1600">
-                <a:latin typeface="Roboto"/>
-                <a:ea typeface="Roboto"/>
-                <a:cs typeface="Roboto"/>
+                <a:latin typeface="Times New Roman"/>
+                <a:ea typeface="Times New Roman"/>
+                <a:cs typeface="Times New Roman"/>
               </a:rPr>
               <a:t>  ✓  Проведён анализ причин и масштаба проблемы cold start в serverless ML inference</a:t>
             </a:r>
@@ -4001,9 +4001,9 @@
             </a:pPr>
             <a:r>
               <a:rPr lang="ru-RU" sz="1600">
-                <a:latin typeface="Roboto"/>
-                <a:ea typeface="Roboto"/>
-                <a:cs typeface="Roboto"/>
+                <a:latin typeface="Times New Roman"/>
+                <a:ea typeface="Times New Roman"/>
+                <a:cs typeface="Times New Roman"/>
               </a:rPr>
               <a:t>  ✓  Исследованы и сравнены 5 решений: Alluxio, JuiceFS, Dragonfly, CubeFS, Rook/Ceph</a:t>
             </a:r>
@@ -4020,9 +4020,9 @@
             </a:pPr>
             <a:r>
               <a:rPr lang="ru-RU" sz="1600">
-                <a:latin typeface="Roboto"/>
-                <a:ea typeface="Roboto"/>
-                <a:cs typeface="Roboto"/>
+                <a:latin typeface="Times New Roman"/>
+                <a:ea typeface="Times New Roman"/>
+                <a:cs typeface="Times New Roman"/>
               </a:rPr>
               <a:t>  ✓  Разработан NFS-этап с Leader Election через Kubernetes Lease</a:t>
             </a:r>
@@ -4039,9 +4039,9 @@
             </a:pPr>
             <a:r>
               <a:rPr lang="ru-RU" sz="1600">
-                <a:latin typeface="Roboto"/>
-                <a:ea typeface="Roboto"/>
-                <a:cs typeface="Roboto"/>
+                <a:latin typeface="Times New Roman"/>
+                <a:ea typeface="Times New Roman"/>
+                <a:cs typeface="Times New Roman"/>
               </a:rPr>
               <a:t>  ✓  Спроектирована P2P/FUSE-архитектура с трёхуровневой иерархией кэша</a:t>
             </a:r>
@@ -4058,9 +4058,9 @@
             </a:pPr>
             <a:r>
               <a:rPr lang="ru-RU" sz="1600">
-                <a:latin typeface="Roboto"/>
-                <a:ea typeface="Roboto"/>
-                <a:cs typeface="Roboto"/>
+                <a:latin typeface="Times New Roman"/>
+                <a:ea typeface="Times New Roman"/>
+                <a:cs typeface="Times New Roman"/>
               </a:rPr>
               <a:t>  ✓  Реализованы storage-agent (DaemonSet) и storage-mounter (FUSE)</a:t>
             </a:r>
@@ -4077,9 +4077,9 @@
             </a:pPr>
             <a:r>
               <a:rPr lang="ru-RU" sz="1600">
-                <a:latin typeface="Roboto"/>
-                <a:ea typeface="Roboto"/>
-                <a:cs typeface="Roboto"/>
+                <a:latin typeface="Times New Roman"/>
+                <a:ea typeface="Times New Roman"/>
+                <a:cs typeface="Times New Roman"/>
               </a:rPr>
               <a:t>  ✓  Обоснован выбор Redis heartbeat vs Gossip Protocol vs mDNS</a:t>
             </a:r>
@@ -4096,9 +4096,9 @@
             </a:pPr>
             <a:r>
               <a:rPr lang="ru-RU" sz="1600">
-                <a:latin typeface="Roboto"/>
-                <a:ea typeface="Roboto"/>
-                <a:cs typeface="Roboto"/>
+                <a:latin typeface="Times New Roman"/>
+                <a:ea typeface="Times New Roman"/>
+                <a:cs typeface="Times New Roman"/>
               </a:rPr>
               <a:t>  ✓  Теоретический анализ: AMAT, Закон Литтла, Амдал, Ципф</a:t>
             </a:r>
@@ -4126,9 +4126,9 @@
             </a:pPr>
             <a:r>
               <a:rPr lang="ru-RU" sz="1800" b="1">
-                <a:latin typeface="Roboto"/>
-                <a:ea typeface="Roboto"/>
-                <a:cs typeface="Roboto"/>
+                <a:latin typeface="Times New Roman"/>
+                <a:ea typeface="Times New Roman"/>
+                <a:cs typeface="Times New Roman"/>
               </a:rPr>
               <a:t>Практическая ценность:</a:t>
             </a:r>
@@ -4156,11 +4156,11 @@
             </a:pPr>
             <a:r>
               <a:rPr lang="ru-RU" sz="1600">
-                <a:latin typeface="Roboto"/>
-                <a:ea typeface="Roboto"/>
-                <a:cs typeface="Roboto"/>
-              </a:rPr>
-              <a:t>  •  135 ГБ экономии внешнего трафика при 10 репликах Llama 3 8B</a:t>
+                <a:latin typeface="Times New Roman"/>
+                <a:ea typeface="Times New Roman"/>
+                <a:cs typeface="Times New Roman"/>
+              </a:rPr>
+              <a:t>  •  135 ГБ экономии внешнего трафика при 10 репликах DeepSeek-LLM 7B</a:t>
             </a:r>
           </a:p>
           <a:p>
@@ -4175,33 +4175,33 @@
             </a:pPr>
             <a:r>
               <a:rPr lang="ru-RU" sz="1600">
-                <a:latin typeface="Roboto"/>
-                <a:ea typeface="Roboto"/>
-                <a:cs typeface="Roboto"/>
+                <a:latin typeface="Times New Roman"/>
+                <a:ea typeface="Times New Roman"/>
+                <a:cs typeface="Times New Roman"/>
               </a:rPr>
               <a:t>  •  </a:t>
             </a:r>
             <a:r>
               <a:rPr lang="ru-RU" sz="1600" i="1">
-                <a:latin typeface="Roboto"/>
-                <a:ea typeface="Roboto"/>
-                <a:cs typeface="Roboto"/>
+                <a:latin typeface="Times New Roman"/>
+                <a:ea typeface="Times New Roman"/>
+                <a:cs typeface="Times New Roman"/>
               </a:rPr>
               <a:t>T</a:t>
             </a:r>
             <a:r>
               <a:rPr lang="ru-RU" sz="1152" baseline="-25000">
-                <a:latin typeface="Roboto"/>
-                <a:ea typeface="Roboto"/>
-                <a:cs typeface="Roboto"/>
+                <a:latin typeface="Times New Roman"/>
+                <a:ea typeface="Times New Roman"/>
+                <a:cs typeface="Times New Roman"/>
               </a:rPr>
               <a:t>model_ready</a:t>
             </a:r>
             <a:r>
               <a:rPr lang="ru-RU" sz="1600">
-                <a:latin typeface="Roboto"/>
-                <a:ea typeface="Roboto"/>
-                <a:cs typeface="Roboto"/>
+                <a:latin typeface="Times New Roman"/>
+                <a:ea typeface="Times New Roman"/>
+                <a:cs typeface="Times New Roman"/>
               </a:rPr>
               <a:t>: 75 с → 2 с при прогретом кластере  (×36 ускорение)</a:t>
             </a:r>
@@ -4218,33 +4218,33 @@
             </a:pPr>
             <a:r>
               <a:rPr lang="ru-RU" sz="1600">
-                <a:latin typeface="Roboto"/>
-                <a:ea typeface="Roboto"/>
-                <a:cs typeface="Roboto"/>
+                <a:latin typeface="Times New Roman"/>
+                <a:ea typeface="Times New Roman"/>
+                <a:cs typeface="Times New Roman"/>
               </a:rPr>
               <a:t>  •  </a:t>
             </a:r>
             <a:r>
               <a:rPr lang="ru-RU" sz="1600" i="1">
-                <a:latin typeface="Roboto"/>
-                <a:ea typeface="Roboto"/>
-                <a:cs typeface="Roboto"/>
+                <a:latin typeface="Times New Roman"/>
+                <a:ea typeface="Times New Roman"/>
+                <a:cs typeface="Times New Roman"/>
               </a:rPr>
               <a:t>T</a:t>
             </a:r>
             <a:r>
               <a:rPr lang="ru-RU" sz="1152" baseline="-25000">
-                <a:latin typeface="Roboto"/>
-                <a:ea typeface="Roboto"/>
-                <a:cs typeface="Roboto"/>
+                <a:latin typeface="Times New Roman"/>
+                <a:ea typeface="Times New Roman"/>
+                <a:cs typeface="Times New Roman"/>
               </a:rPr>
               <a:t>first_byte</a:t>
             </a:r>
             <a:r>
               <a:rPr lang="ru-RU" sz="1600">
-                <a:latin typeface="Roboto"/>
-                <a:ea typeface="Roboto"/>
-                <a:cs typeface="Roboto"/>
+                <a:latin typeface="Times New Roman"/>
+                <a:ea typeface="Times New Roman"/>
+                <a:cs typeface="Times New Roman"/>
               </a:rPr>
               <a:t> &lt; 1 с благодаря FUSE lazy loading  (было 75 с)</a:t>
             </a:r>
@@ -4261,9 +4261,9 @@
             </a:pPr>
             <a:r>
               <a:rPr lang="ru-RU" sz="1600">
-                <a:latin typeface="Roboto"/>
-                <a:ea typeface="Roboto"/>
-                <a:cs typeface="Roboto"/>
+                <a:latin typeface="Times New Roman"/>
+                <a:ea typeface="Times New Roman"/>
+                <a:cs typeface="Times New Roman"/>
               </a:rPr>
               <a:t>  •  Устранение NFS как единственной точки отказа</a:t>
             </a:r>
@@ -4329,9 +4329,9 @@
             </a:pPr>
             <a:r>
               <a:rPr lang="ru-RU" sz="2800" b="1">
-                <a:latin typeface="Roboto"/>
-                <a:ea typeface="Roboto"/>
-                <a:cs typeface="Roboto"/>
+                <a:latin typeface="Times New Roman"/>
+                <a:ea typeface="Times New Roman"/>
+                <a:cs typeface="Times New Roman"/>
               </a:rPr>
               <a:t>Направления дальнейшего развития</a:t>
             </a:r>
@@ -4371,9 +4371,9 @@
             </a:pPr>
             <a:r>
               <a:rPr lang="ru-RU" sz="1700">
-                <a:latin typeface="Roboto"/>
-                <a:ea typeface="Roboto"/>
-                <a:cs typeface="Roboto"/>
+                <a:latin typeface="Times New Roman"/>
+                <a:ea typeface="Times New Roman"/>
+                <a:cs typeface="Times New Roman"/>
               </a:rPr>
               <a:t>  1.  Gossip-based peer discovery — P2P без зависимости от Redis</a:t>
             </a:r>
@@ -4390,9 +4390,9 @@
             </a:pPr>
             <a:r>
               <a:rPr lang="ru-RU" sz="1700">
-                <a:latin typeface="Roboto"/>
-                <a:ea typeface="Roboto"/>
-                <a:cs typeface="Roboto"/>
+                <a:latin typeface="Times New Roman"/>
+                <a:ea typeface="Times New Roman"/>
+                <a:cs typeface="Times New Roman"/>
               </a:rPr>
               <a:t>  2.  mTLS между storage-agent — аутентификация TCP для production</a:t>
             </a:r>
@@ -4409,9 +4409,9 @@
             </a:pPr>
             <a:r>
               <a:rPr lang="ru-RU" sz="1700">
-                <a:latin typeface="Roboto"/>
-                <a:ea typeface="Roboto"/>
-                <a:cs typeface="Roboto"/>
+                <a:latin typeface="Times New Roman"/>
+                <a:ea typeface="Times New Roman"/>
+                <a:cs typeface="Times New Roman"/>
               </a:rPr>
               <a:t>  3.  Cache warming — предзагрузка по расписанию, Zipf-прогнозирование</a:t>
             </a:r>
@@ -4428,9 +4428,9 @@
             </a:pPr>
             <a:r>
               <a:rPr lang="ru-RU" sz="1700">
-                <a:latin typeface="Roboto"/>
-                <a:ea typeface="Roboto"/>
-                <a:cs typeface="Roboto"/>
+                <a:latin typeface="Times New Roman"/>
+                <a:ea typeface="Times New Roman"/>
+                <a:cs typeface="Times New Roman"/>
               </a:rPr>
               <a:t>  4.  CSI-плагин — нативная интеграция с Kubernetes PVC</a:t>
             </a:r>
@@ -4447,9 +4447,9 @@
             </a:pPr>
             <a:r>
               <a:rPr lang="ru-RU" sz="1700">
-                <a:latin typeface="Roboto"/>
-                <a:ea typeface="Roboto"/>
-                <a:cs typeface="Roboto"/>
+                <a:latin typeface="Times New Roman"/>
+                <a:ea typeface="Times New Roman"/>
+                <a:cs typeface="Times New Roman"/>
               </a:rPr>
               <a:t>  5.  Поддержка Ollama и ModelScope помимо HuggingFace Hub</a:t>
             </a:r>
@@ -4466,9 +4466,9 @@
             </a:pPr>
             <a:r>
               <a:rPr lang="ru-RU" sz="1700">
-                <a:latin typeface="Roboto"/>
-                <a:ea typeface="Roboto"/>
-                <a:cs typeface="Roboto"/>
+                <a:latin typeface="Times New Roman"/>
+                <a:ea typeface="Times New Roman"/>
+                <a:cs typeface="Times New Roman"/>
               </a:rPr>
               <a:t>  6.  Экспериментальная валидация на реальном GPU-кластере с vLLM</a:t>
             </a:r>
@@ -4499,9 +4499,9 @@
                 <a:solidFill>
                   <a:srgbClr val="158158"/>
                 </a:solidFill>
-                <a:latin typeface="Roboto"/>
-                <a:ea typeface="Roboto"/>
-                <a:cs typeface="Roboto"/>
+                <a:latin typeface="Times New Roman"/>
+                <a:ea typeface="Times New Roman"/>
+                <a:cs typeface="Times New Roman"/>
               </a:rPr>
               <a:t>Система позволяет сократить задержку холодного старта на порядок при отсутствии деградации надёжности — что критично для production serverless ML inference.</a:t>
             </a:r>
@@ -4567,9 +4567,9 @@
             </a:pPr>
             <a:r>
               <a:rPr lang="ru-RU" sz="2800" b="1">
-                <a:latin typeface="Roboto"/>
-                <a:ea typeface="Roboto"/>
-                <a:cs typeface="Roboto"/>
+                <a:latin typeface="Times New Roman"/>
+                <a:ea typeface="Times New Roman"/>
+                <a:cs typeface="Times New Roman"/>
               </a:rPr>
               <a:t>Актуальность темы</a:t>
             </a:r>
@@ -4609,9 +4609,9 @@
             </a:pPr>
             <a:r>
               <a:rPr lang="ru-RU" sz="1750" b="1">
-                <a:latin typeface="Roboto"/>
-                <a:ea typeface="Roboto"/>
-                <a:cs typeface="Roboto"/>
+                <a:latin typeface="Times New Roman"/>
+                <a:ea typeface="Times New Roman"/>
+                <a:cs typeface="Times New Roman"/>
               </a:rPr>
               <a:t>Размеры языковых моделей растут:</a:t>
             </a:r>
@@ -4639,9 +4639,9 @@
             </a:pPr>
             <a:r>
               <a:rPr lang="ru-RU" sz="1550">
-                <a:latin typeface="Roboto"/>
-                <a:ea typeface="Roboto"/>
-                <a:cs typeface="Roboto"/>
+                <a:latin typeface="Times New Roman"/>
+                <a:ea typeface="Times New Roman"/>
+                <a:cs typeface="Times New Roman"/>
               </a:rPr>
               <a:t>  BERT Base (2018):    ~0,22 ГБ весов</a:t>
             </a:r>
@@ -4658,9 +4658,9 @@
             </a:pPr>
             <a:r>
               <a:rPr lang="ru-RU" sz="1550">
-                <a:latin typeface="Roboto"/>
-                <a:ea typeface="Roboto"/>
-                <a:cs typeface="Roboto"/>
+                <a:latin typeface="Times New Roman"/>
+                <a:ea typeface="Times New Roman"/>
+                <a:cs typeface="Times New Roman"/>
               </a:rPr>
               <a:t>  GPT-3 (2020):        ~350 ГБ весов</a:t>
             </a:r>
@@ -4677,9 +4677,9 @@
             </a:pPr>
             <a:r>
               <a:rPr lang="ru-RU" sz="1550">
-                <a:latin typeface="Roboto"/>
-                <a:ea typeface="Roboto"/>
-                <a:cs typeface="Roboto"/>
+                <a:latin typeface="Times New Roman"/>
+                <a:ea typeface="Times New Roman"/>
+                <a:cs typeface="Times New Roman"/>
               </a:rPr>
               <a:t>  DeepSeek V2 (2024):  ~472 ГБ весов</a:t>
             </a:r>
@@ -4696,9 +4696,9 @@
             </a:pPr>
             <a:r>
               <a:rPr lang="ru-RU" sz="1550">
-                <a:latin typeface="Roboto"/>
-                <a:ea typeface="Roboto"/>
-                <a:cs typeface="Roboto"/>
+                <a:latin typeface="Times New Roman"/>
+                <a:ea typeface="Times New Roman"/>
+                <a:cs typeface="Times New Roman"/>
               </a:rPr>
               <a:t>  GLM-4.5 (2025):      ~717 ГБ весов</a:t>
             </a:r>
@@ -4715,9 +4715,9 @@
             </a:pPr>
             <a:r>
               <a:rPr lang="ru-RU" sz="1550">
-                <a:latin typeface="Roboto"/>
-                <a:ea typeface="Roboto"/>
-                <a:cs typeface="Roboto"/>
+                <a:latin typeface="Times New Roman"/>
+                <a:ea typeface="Times New Roman"/>
+                <a:cs typeface="Times New Roman"/>
               </a:rPr>
               <a:t>  DeepSeek V4 Pro (2026): ~1,72 ТБ</a:t>
             </a:r>
@@ -4745,9 +4745,9 @@
             </a:pPr>
             <a:r>
               <a:rPr lang="ru-RU" sz="1750" b="1">
-                <a:latin typeface="Roboto"/>
-                <a:ea typeface="Roboto"/>
-                <a:cs typeface="Roboto"/>
+                <a:latin typeface="Times New Roman"/>
+                <a:ea typeface="Times New Roman"/>
+                <a:cs typeface="Times New Roman"/>
               </a:rPr>
               <a:t>Следствие для serverless-инференса:</a:t>
             </a:r>
@@ -4775,9 +4775,9 @@
             </a:pPr>
             <a:r>
               <a:rPr lang="ru-RU" sz="1550">
-                <a:latin typeface="Roboto"/>
-                <a:ea typeface="Roboto"/>
-                <a:cs typeface="Roboto"/>
+                <a:latin typeface="Times New Roman"/>
+                <a:ea typeface="Times New Roman"/>
+                <a:cs typeface="Times New Roman"/>
               </a:rPr>
               <a:t>  При scale-up Pod заново скачивает модель</a:t>
             </a:r>
@@ -4794,9 +4794,9 @@
             </a:pPr>
             <a:r>
               <a:rPr lang="ru-RU" sz="1550">
-                <a:latin typeface="Roboto"/>
-                <a:ea typeface="Roboto"/>
-                <a:cs typeface="Roboto"/>
+                <a:latin typeface="Times New Roman"/>
+                <a:ea typeface="Times New Roman"/>
+                <a:cs typeface="Times New Roman"/>
               </a:rPr>
               <a:t>  15 ГБ × 200 МБ/с = 75 с до первого токена</a:t>
             </a:r>
@@ -4813,9 +4813,9 @@
             </a:pPr>
             <a:r>
               <a:rPr lang="ru-RU" sz="1550">
-                <a:latin typeface="Roboto"/>
-                <a:ea typeface="Roboto"/>
-                <a:cs typeface="Roboto"/>
+                <a:latin typeface="Times New Roman"/>
+                <a:ea typeface="Times New Roman"/>
+                <a:cs typeface="Times New Roman"/>
               </a:rPr>
               <a:t>  10 реплик = 150 ГБ внешнего трафика</a:t>
             </a:r>
@@ -4835,9 +4835,9 @@
                 <a:solidFill>
                   <a:srgbClr val="C62828"/>
                 </a:solidFill>
-                <a:latin typeface="Roboto"/>
-                <a:ea typeface="Roboto"/>
-                <a:cs typeface="Roboto"/>
+                <a:latin typeface="Times New Roman"/>
+                <a:ea typeface="Times New Roman"/>
+                <a:cs typeface="Times New Roman"/>
               </a:rPr>
               <a:t>  p99 latency → минуты → нарушение SLA</a:t>
             </a:r>
@@ -4927,9 +4927,9 @@
             </a:pPr>
             <a:r>
               <a:rPr lang="ru-RU" sz="2800" b="1">
-                <a:latin typeface="Roboto"/>
-                <a:ea typeface="Roboto"/>
-                <a:cs typeface="Roboto"/>
+                <a:latin typeface="Times New Roman"/>
+                <a:ea typeface="Times New Roman"/>
+                <a:cs typeface="Times New Roman"/>
               </a:rPr>
               <a:t>Цель и задачи работы</a:t>
             </a:r>
@@ -4969,9 +4969,9 @@
             </a:pPr>
             <a:r>
               <a:rPr lang="ru-RU" sz="1800" b="1">
-                <a:latin typeface="Roboto"/>
-                <a:ea typeface="Roboto"/>
-                <a:cs typeface="Roboto"/>
+                <a:latin typeface="Times New Roman"/>
+                <a:ea typeface="Times New Roman"/>
+                <a:cs typeface="Times New Roman"/>
               </a:rPr>
               <a:t>Цель:</a:t>
             </a:r>
@@ -4999,9 +4999,9 @@
             </a:pPr>
             <a:r>
               <a:rPr lang="ru-RU" sz="1700" i="1">
-                <a:latin typeface="Roboto"/>
-                <a:ea typeface="Roboto"/>
-                <a:cs typeface="Roboto"/>
+                <a:latin typeface="Times New Roman"/>
+                <a:ea typeface="Times New Roman"/>
+                <a:cs typeface="Times New Roman"/>
               </a:rPr>
               <a:t>Разработка архитектуры распределённого кэширования ML-моделей для serverless-инференса в Kubernetes, сокращающей задержку холодного старта и снижающей нагрузку на внешние репозитории.</a:t>
             </a:r>
@@ -5029,9 +5029,9 @@
             </a:pPr>
             <a:r>
               <a:rPr lang="ru-RU" sz="1800" b="1">
-                <a:latin typeface="Roboto"/>
-                <a:ea typeface="Roboto"/>
-                <a:cs typeface="Roboto"/>
+                <a:latin typeface="Times New Roman"/>
+                <a:ea typeface="Times New Roman"/>
+                <a:cs typeface="Times New Roman"/>
               </a:rPr>
               <a:t>Задачи:</a:t>
             </a:r>
@@ -5059,9 +5059,9 @@
             </a:pPr>
             <a:r>
               <a:rPr lang="ru-RU" sz="1600">
-                <a:latin typeface="Roboto"/>
-                <a:ea typeface="Roboto"/>
-                <a:cs typeface="Roboto"/>
+                <a:latin typeface="Times New Roman"/>
+                <a:ea typeface="Times New Roman"/>
+                <a:cs typeface="Times New Roman"/>
               </a:rPr>
               <a:t>  1.  Анализ причин холодного старта и масштаба проблемы роста весов моделей</a:t>
             </a:r>
@@ -5078,9 +5078,9 @@
             </a:pPr>
             <a:r>
               <a:rPr lang="ru-RU" sz="1600">
-                <a:latin typeface="Roboto"/>
-                <a:ea typeface="Roboto"/>
-                <a:cs typeface="Roboto"/>
+                <a:latin typeface="Times New Roman"/>
+                <a:ea typeface="Times New Roman"/>
+                <a:cs typeface="Times New Roman"/>
               </a:rPr>
               <a:t>  2.  Исследование существующих решений: Alluxio, JuiceFS, Dragonfly, CubeFS, Rook/Ceph</a:t>
             </a:r>
@@ -5097,9 +5097,9 @@
             </a:pPr>
             <a:r>
               <a:rPr lang="ru-RU" sz="1600">
-                <a:latin typeface="Roboto"/>
-                <a:ea typeface="Roboto"/>
-                <a:cs typeface="Roboto"/>
+                <a:latin typeface="Times New Roman"/>
+                <a:ea typeface="Times New Roman"/>
+                <a:cs typeface="Times New Roman"/>
               </a:rPr>
               <a:t>  3.  Разработка NFS-этапа с координацией через flock и Kubernetes Lease</a:t>
             </a:r>
@@ -5116,9 +5116,9 @@
             </a:pPr>
             <a:r>
               <a:rPr lang="ru-RU" sz="1600">
-                <a:latin typeface="Roboto"/>
-                <a:ea typeface="Roboto"/>
-                <a:cs typeface="Roboto"/>
+                <a:latin typeface="Times New Roman"/>
+                <a:ea typeface="Times New Roman"/>
+                <a:cs typeface="Times New Roman"/>
               </a:rPr>
               <a:t>  4.  Проектирование P2P/FUSE-архитектуры с трёхуровневой иерархией кэша</a:t>
             </a:r>
@@ -5135,9 +5135,9 @@
             </a:pPr>
             <a:r>
               <a:rPr lang="ru-RU" sz="1600">
-                <a:latin typeface="Roboto"/>
-                <a:ea typeface="Roboto"/>
-                <a:cs typeface="Roboto"/>
+                <a:latin typeface="Times New Roman"/>
+                <a:ea typeface="Times New Roman"/>
+                <a:cs typeface="Times New Roman"/>
               </a:rPr>
               <a:t>  5.  Реализация storage-agent (DaemonSet) и storage-mounter (FUSE-клиент)</a:t>
             </a:r>
@@ -5154,9 +5154,9 @@
             </a:pPr>
             <a:r>
               <a:rPr lang="ru-RU" sz="1600">
-                <a:latin typeface="Roboto"/>
-                <a:ea typeface="Roboto"/>
-                <a:cs typeface="Roboto"/>
+                <a:latin typeface="Times New Roman"/>
+                <a:ea typeface="Times New Roman"/>
+                <a:cs typeface="Times New Roman"/>
               </a:rPr>
               <a:t>  6.  Выбор механизма обнаружения узлов: Redis heartbeat vs Gossip vs mDNS</a:t>
             </a:r>
@@ -5173,9 +5173,9 @@
             </a:pPr>
             <a:r>
               <a:rPr lang="ru-RU" sz="1600">
-                <a:latin typeface="Roboto"/>
-                <a:ea typeface="Roboto"/>
-                <a:cs typeface="Roboto"/>
+                <a:latin typeface="Times New Roman"/>
+                <a:ea typeface="Times New Roman"/>
+                <a:cs typeface="Times New Roman"/>
               </a:rPr>
               <a:t>  7.  Теоретический анализ: AMAT, Закон Литтла, Амдал, Ципф</a:t>
             </a:r>
@@ -5192,9 +5192,9 @@
             </a:pPr>
             <a:r>
               <a:rPr lang="ru-RU" sz="1600">
-                <a:latin typeface="Roboto"/>
-                <a:ea typeface="Roboto"/>
-                <a:cs typeface="Roboto"/>
+                <a:latin typeface="Times New Roman"/>
+                <a:ea typeface="Times New Roman"/>
+                <a:cs typeface="Times New Roman"/>
               </a:rPr>
               <a:t>  8.  Формирование методики оценки эффективности с расчётными значениями</a:t>
             </a:r>
@@ -5260,9 +5260,9 @@
             </a:pPr>
             <a:r>
               <a:rPr lang="ru-RU" sz="2800" b="1">
-                <a:latin typeface="Roboto"/>
-                <a:ea typeface="Roboto"/>
-                <a:cs typeface="Roboto"/>
+                <a:latin typeface="Times New Roman"/>
+                <a:ea typeface="Times New Roman"/>
+                <a:cs typeface="Times New Roman"/>
               </a:rPr>
               <a:t>Исходная архитектура: storage-initializer + emptyDir</a:t>
             </a:r>
@@ -5302,9 +5302,9 @@
             </a:pPr>
             <a:r>
               <a:rPr lang="ru-RU" sz="1700" b="1">
-                <a:latin typeface="Roboto"/>
-                <a:ea typeface="Roboto"/>
-                <a:cs typeface="Roboto"/>
+                <a:latin typeface="Times New Roman"/>
+                <a:ea typeface="Times New Roman"/>
+                <a:cs typeface="Times New Roman"/>
               </a:rPr>
               <a:t>Поток запуска пода:</a:t>
             </a:r>
@@ -5332,9 +5332,9 @@
             </a:pPr>
             <a:r>
               <a:rPr lang="ru-RU" sz="1520">
-                <a:latin typeface="Roboto"/>
-                <a:ea typeface="Roboto"/>
-                <a:cs typeface="Roboto"/>
+                <a:latin typeface="Times New Roman"/>
+                <a:ea typeface="Times New Roman"/>
+                <a:cs typeface="Times New Roman"/>
               </a:rPr>
               <a:t>1.  Scheduler размещает Pod на worker-ноде</a:t>
             </a:r>
@@ -5351,9 +5351,9 @@
             </a:pPr>
             <a:r>
               <a:rPr lang="ru-RU" sz="1520">
-                <a:latin typeface="Roboto"/>
-                <a:ea typeface="Roboto"/>
-                <a:cs typeface="Roboto"/>
+                <a:latin typeface="Times New Roman"/>
+                <a:ea typeface="Times New Roman"/>
+                <a:cs typeface="Times New Roman"/>
               </a:rPr>
               <a:t>2.  storage-initializer скачивает модель
      из HuggingFace в volume emptyDir</a:t>
@@ -5371,9 +5371,9 @@
             </a:pPr>
             <a:r>
               <a:rPr lang="ru-RU" sz="1520">
-                <a:latin typeface="Roboto"/>
-                <a:ea typeface="Roboto"/>
-                <a:cs typeface="Roboto"/>
+                <a:latin typeface="Times New Roman"/>
+                <a:ea typeface="Times New Roman"/>
+                <a:cs typeface="Times New Roman"/>
               </a:rPr>
               <a:t>3.  runtime-container монтирует emptyDir
      и загружает веса в CPU / GPU</a:t>
@@ -5402,9 +5402,9 @@
             </a:pPr>
             <a:r>
               <a:rPr lang="ru-RU" sz="1700" b="1">
-                <a:latin typeface="Roboto"/>
-                <a:ea typeface="Roboto"/>
-                <a:cs typeface="Roboto"/>
+                <a:latin typeface="Times New Roman"/>
+                <a:ea typeface="Times New Roman"/>
+                <a:cs typeface="Times New Roman"/>
               </a:rPr>
               <a:t>Ключевые проблемы:</a:t>
             </a:r>
@@ -5432,9 +5432,9 @@
             </a:pPr>
             <a:r>
               <a:rPr lang="ru-RU" sz="1520">
-                <a:latin typeface="Roboto"/>
-                <a:ea typeface="Roboto"/>
-                <a:cs typeface="Roboto"/>
+                <a:latin typeface="Times New Roman"/>
+                <a:ea typeface="Times New Roman"/>
+                <a:cs typeface="Times New Roman"/>
               </a:rPr>
               <a:t>  ✕  Нет переиспользования — каждый Pod скачивает заново</a:t>
             </a:r>
@@ -5451,9 +5451,9 @@
             </a:pPr>
             <a:r>
               <a:rPr lang="ru-RU" sz="1520">
-                <a:latin typeface="Roboto"/>
-                <a:ea typeface="Roboto"/>
-                <a:cs typeface="Roboto"/>
+                <a:latin typeface="Times New Roman"/>
+                <a:ea typeface="Times New Roman"/>
+                <a:cs typeface="Times New Roman"/>
               </a:rPr>
               <a:t>  ✕  10 реплик = 10 × 15 ГБ = 150 ГБ внешнего трафика</a:t>
             </a:r>
@@ -5470,57 +5470,57 @@
             </a:pPr>
             <a:r>
               <a:rPr lang="ru-RU" sz="1520">
-                <a:latin typeface="Roboto"/>
-                <a:ea typeface="Roboto"/>
-                <a:cs typeface="Roboto"/>
+                <a:latin typeface="Times New Roman"/>
+                <a:ea typeface="Times New Roman"/>
+                <a:cs typeface="Times New Roman"/>
               </a:rPr>
               <a:t>  ✕  </a:t>
             </a:r>
             <a:r>
               <a:rPr lang="ru-RU" sz="1520" i="1">
-                <a:latin typeface="Roboto"/>
-                <a:ea typeface="Roboto"/>
-                <a:cs typeface="Roboto"/>
+                <a:latin typeface="Times New Roman"/>
+                <a:ea typeface="Times New Roman"/>
+                <a:cs typeface="Times New Roman"/>
               </a:rPr>
               <a:t>T</a:t>
             </a:r>
             <a:r>
               <a:rPr lang="ru-RU" sz="1094" baseline="-25000">
-                <a:latin typeface="Roboto"/>
-                <a:ea typeface="Roboto"/>
-                <a:cs typeface="Roboto"/>
+                <a:latin typeface="Times New Roman"/>
+                <a:ea typeface="Times New Roman"/>
+                <a:cs typeface="Times New Roman"/>
               </a:rPr>
               <a:t>first_byte</a:t>
             </a:r>
             <a:r>
               <a:rPr lang="ru-RU" sz="1520">
-                <a:latin typeface="Roboto"/>
-                <a:ea typeface="Roboto"/>
-                <a:cs typeface="Roboto"/>
+                <a:latin typeface="Times New Roman"/>
+                <a:ea typeface="Times New Roman"/>
+                <a:cs typeface="Times New Roman"/>
               </a:rPr>
               <a:t> = </a:t>
             </a:r>
             <a:r>
               <a:rPr lang="ru-RU" sz="1520" i="1">
-                <a:latin typeface="Roboto"/>
-                <a:ea typeface="Roboto"/>
-                <a:cs typeface="Roboto"/>
+                <a:latin typeface="Times New Roman"/>
+                <a:ea typeface="Times New Roman"/>
+                <a:cs typeface="Times New Roman"/>
               </a:rPr>
               <a:t>T</a:t>
             </a:r>
             <a:r>
               <a:rPr lang="ru-RU" sz="1094" baseline="-25000">
-                <a:latin typeface="Roboto"/>
-                <a:ea typeface="Roboto"/>
-                <a:cs typeface="Roboto"/>
+                <a:latin typeface="Times New Roman"/>
+                <a:ea typeface="Times New Roman"/>
+                <a:cs typeface="Times New Roman"/>
               </a:rPr>
               <a:t>model_ready</a:t>
             </a:r>
             <a:r>
               <a:rPr lang="ru-RU" sz="1520">
-                <a:latin typeface="Roboto"/>
-                <a:ea typeface="Roboto"/>
-                <a:cs typeface="Roboto"/>
+                <a:latin typeface="Times New Roman"/>
+                <a:ea typeface="Times New Roman"/>
+                <a:cs typeface="Times New Roman"/>
               </a:rPr>
               <a:t> ≈ 75 с</a:t>
             </a:r>
@@ -5537,9 +5537,9 @@
             </a:pPr>
             <a:r>
               <a:rPr lang="ru-RU" sz="1520">
-                <a:latin typeface="Roboto"/>
-                <a:ea typeface="Roboto"/>
-                <a:cs typeface="Roboto"/>
+                <a:latin typeface="Times New Roman"/>
+                <a:ea typeface="Times New Roman"/>
+                <a:cs typeface="Times New Roman"/>
               </a:rPr>
               <a:t>  ✕  Привязка к доступности HuggingFace Hub</a:t>
             </a:r>
@@ -5629,9 +5629,9 @@
             </a:pPr>
             <a:r>
               <a:rPr lang="ru-RU" sz="2800" b="1">
-                <a:latin typeface="Roboto"/>
-                <a:ea typeface="Roboto"/>
-                <a:cs typeface="Roboto"/>
+                <a:latin typeface="Times New Roman"/>
+                <a:ea typeface="Times New Roman"/>
+                <a:cs typeface="Times New Roman"/>
               </a:rPr>
               <a:t>Требования к архитектуре</a:t>
             </a:r>
@@ -5714,57 +5714,57 @@
             </a:pPr>
             <a:r>
               <a:rPr lang="ru-RU" sz="1350" b="1">
-                <a:latin typeface="Roboto"/>
-                <a:ea typeface="Roboto"/>
-                <a:cs typeface="Roboto"/>
+                <a:latin typeface="Times New Roman"/>
+                <a:ea typeface="Times New Roman"/>
+                <a:cs typeface="Times New Roman"/>
               </a:rPr>
               <a:t>Метрики: </a:t>
             </a:r>
             <a:r>
               <a:rPr lang="ru-RU" sz="1350" i="1">
-                <a:latin typeface="Roboto"/>
-                <a:ea typeface="Roboto"/>
-                <a:cs typeface="Roboto"/>
+                <a:latin typeface="Times New Roman"/>
+                <a:ea typeface="Times New Roman"/>
+                <a:cs typeface="Times New Roman"/>
               </a:rPr>
               <a:t>T</a:t>
             </a:r>
             <a:r>
               <a:rPr lang="ru-RU" sz="972" baseline="-25000">
-                <a:latin typeface="Roboto"/>
-                <a:ea typeface="Roboto"/>
-                <a:cs typeface="Roboto"/>
+                <a:latin typeface="Times New Roman"/>
+                <a:ea typeface="Times New Roman"/>
+                <a:cs typeface="Times New Roman"/>
               </a:rPr>
               <a:t>model_ready</a:t>
             </a:r>
             <a:r>
               <a:rPr lang="ru-RU" sz="1350">
-                <a:latin typeface="Roboto"/>
-                <a:ea typeface="Roboto"/>
-                <a:cs typeface="Roboto"/>
+                <a:latin typeface="Times New Roman"/>
+                <a:ea typeface="Times New Roman"/>
+                <a:cs typeface="Times New Roman"/>
               </a:rPr>
               <a:t> — время от планирования пода до готовности ML-runtime принять первый запрос;  </a:t>
             </a:r>
             <a:r>
               <a:rPr lang="ru-RU" sz="1350" i="1">
-                <a:latin typeface="Roboto"/>
-                <a:ea typeface="Roboto"/>
-                <a:cs typeface="Roboto"/>
+                <a:latin typeface="Times New Roman"/>
+                <a:ea typeface="Times New Roman"/>
+                <a:cs typeface="Times New Roman"/>
               </a:rPr>
               <a:t>T</a:t>
             </a:r>
             <a:r>
               <a:rPr lang="ru-RU" sz="972" baseline="-25000">
-                <a:latin typeface="Roboto"/>
-                <a:ea typeface="Roboto"/>
-                <a:cs typeface="Roboto"/>
+                <a:latin typeface="Times New Roman"/>
+                <a:ea typeface="Times New Roman"/>
+                <a:cs typeface="Times New Roman"/>
               </a:rPr>
               <a:t>first_byte</a:t>
             </a:r>
             <a:r>
               <a:rPr lang="ru-RU" sz="1350">
-                <a:latin typeface="Roboto"/>
-                <a:ea typeface="Roboto"/>
-                <a:cs typeface="Roboto"/>
+                <a:latin typeface="Times New Roman"/>
+                <a:ea typeface="Times New Roman"/>
+                <a:cs typeface="Times New Roman"/>
               </a:rPr>
               <a:t> — время до первого байта данных модели при lazy FUSE loading</a:t>
             </a:r>
@@ -5804,9 +5804,9 @@
             </a:pPr>
             <a:r>
               <a:rPr lang="ru-RU" sz="1800" b="1">
-                <a:latin typeface="Roboto"/>
-                <a:ea typeface="Roboto"/>
-                <a:cs typeface="Roboto"/>
+                <a:latin typeface="Times New Roman"/>
+                <a:ea typeface="Times New Roman"/>
+                <a:cs typeface="Times New Roman"/>
               </a:rPr>
               <a:t>Функциональные:</a:t>
             </a:r>
@@ -5834,9 +5834,9 @@
             </a:pPr>
             <a:r>
               <a:rPr lang="ru-RU" sz="1500">
-                <a:latin typeface="Roboto"/>
-                <a:ea typeface="Roboto"/>
-                <a:cs typeface="Roboto"/>
+                <a:latin typeface="Times New Roman"/>
+                <a:ea typeface="Times New Roman"/>
+                <a:cs typeface="Times New Roman"/>
               </a:rPr>
               <a:t>  •  Переиспользование весов между запусками</a:t>
             </a:r>
@@ -5853,9 +5853,9 @@
             </a:pPr>
             <a:r>
               <a:rPr lang="ru-RU" sz="1500">
-                <a:latin typeface="Roboto"/>
-                <a:ea typeface="Roboto"/>
-                <a:cs typeface="Roboto"/>
+                <a:latin typeface="Times New Roman"/>
+                <a:ea typeface="Times New Roman"/>
+                <a:cs typeface="Times New Roman"/>
               </a:rPr>
               <a:t>  •  P2P-передача чанков между нодами без HF Hub</a:t>
             </a:r>
@@ -5872,9 +5872,9 @@
             </a:pPr>
             <a:r>
               <a:rPr lang="ru-RU" sz="1500">
-                <a:latin typeface="Roboto"/>
-                <a:ea typeface="Roboto"/>
-                <a:cs typeface="Roboto"/>
+                <a:latin typeface="Times New Roman"/>
+                <a:ea typeface="Times New Roman"/>
+                <a:cs typeface="Times New Roman"/>
               </a:rPr>
               <a:t>  •  Стандартный POSIX-интерфейс для ML-runtime</a:t>
             </a:r>
@@ -5891,9 +5891,9 @@
             </a:pPr>
             <a:r>
               <a:rPr lang="ru-RU" sz="1500">
-                <a:latin typeface="Roboto"/>
-                <a:ea typeface="Roboto"/>
-                <a:cs typeface="Roboto"/>
+                <a:latin typeface="Times New Roman"/>
+                <a:ea typeface="Times New Roman"/>
+                <a:cs typeface="Times New Roman"/>
               </a:rPr>
               <a:t>  •  Автоматический fallback на внешний репозиторий</a:t>
             </a:r>
@@ -5910,9 +5910,9 @@
             </a:pPr>
             <a:r>
               <a:rPr lang="ru-RU" sz="1500">
-                <a:latin typeface="Roboto"/>
-                <a:ea typeface="Roboto"/>
-                <a:cs typeface="Roboto"/>
+                <a:latin typeface="Times New Roman"/>
+                <a:ea typeface="Times New Roman"/>
+                <a:cs typeface="Times New Roman"/>
               </a:rPr>
               <a:t>  •  Совместимость с Kubernetes (DaemonSet, CSI)</a:t>
             </a:r>
@@ -5929,9 +5929,9 @@
             </a:pPr>
             <a:r>
               <a:rPr lang="ru-RU" sz="1500">
-                <a:latin typeface="Roboto"/>
-                <a:ea typeface="Roboto"/>
-                <a:cs typeface="Roboto"/>
+                <a:latin typeface="Times New Roman"/>
+                <a:ea typeface="Times New Roman"/>
+                <a:cs typeface="Times New Roman"/>
               </a:rPr>
               <a:t>  •  Атомарная запись чанков: tmp-файл → os.Rename</a:t>
             </a:r>
@@ -5971,9 +5971,9 @@
             </a:pPr>
             <a:r>
               <a:rPr lang="ru-RU" sz="1800" b="1">
-                <a:latin typeface="Roboto"/>
-                <a:ea typeface="Roboto"/>
-                <a:cs typeface="Roboto"/>
+                <a:latin typeface="Times New Roman"/>
+                <a:ea typeface="Times New Roman"/>
+                <a:cs typeface="Times New Roman"/>
               </a:rPr>
               <a:t>Нефункциональные:</a:t>
             </a:r>
@@ -6001,33 +6001,33 @@
             </a:pPr>
             <a:r>
               <a:rPr lang="ru-RU" sz="1500">
-                <a:latin typeface="Roboto"/>
-                <a:ea typeface="Roboto"/>
-                <a:cs typeface="Roboto"/>
+                <a:latin typeface="Times New Roman"/>
+                <a:ea typeface="Times New Roman"/>
+                <a:cs typeface="Times New Roman"/>
               </a:rPr>
               <a:t>  •  </a:t>
             </a:r>
             <a:r>
               <a:rPr lang="ru-RU" sz="1500" i="1">
-                <a:latin typeface="Roboto"/>
-                <a:ea typeface="Roboto"/>
-                <a:cs typeface="Roboto"/>
+                <a:latin typeface="Times New Roman"/>
+                <a:ea typeface="Times New Roman"/>
+                <a:cs typeface="Times New Roman"/>
               </a:rPr>
               <a:t>T</a:t>
             </a:r>
             <a:r>
               <a:rPr lang="ru-RU" sz="1080" baseline="-25000">
-                <a:latin typeface="Roboto"/>
-                <a:ea typeface="Roboto"/>
-                <a:cs typeface="Roboto"/>
+                <a:latin typeface="Times New Roman"/>
+                <a:ea typeface="Times New Roman"/>
+                <a:cs typeface="Times New Roman"/>
               </a:rPr>
               <a:t>model_ready</a:t>
             </a:r>
             <a:r>
               <a:rPr lang="ru-RU" sz="1500">
-                <a:latin typeface="Roboto"/>
-                <a:ea typeface="Roboto"/>
-                <a:cs typeface="Roboto"/>
+                <a:latin typeface="Times New Roman"/>
+                <a:ea typeface="Times New Roman"/>
+                <a:cs typeface="Times New Roman"/>
               </a:rPr>
               <a:t> при local hit ≤ 3 с (15 ГБ)</a:t>
             </a:r>
@@ -6044,33 +6044,33 @@
             </a:pPr>
             <a:r>
               <a:rPr lang="ru-RU" sz="1500">
-                <a:latin typeface="Roboto"/>
-                <a:ea typeface="Roboto"/>
-                <a:cs typeface="Roboto"/>
+                <a:latin typeface="Times New Roman"/>
+                <a:ea typeface="Times New Roman"/>
+                <a:cs typeface="Times New Roman"/>
               </a:rPr>
               <a:t>  •  </a:t>
             </a:r>
             <a:r>
               <a:rPr lang="ru-RU" sz="1500" i="1">
-                <a:latin typeface="Roboto"/>
-                <a:ea typeface="Roboto"/>
-                <a:cs typeface="Roboto"/>
+                <a:latin typeface="Times New Roman"/>
+                <a:ea typeface="Times New Roman"/>
+                <a:cs typeface="Times New Roman"/>
               </a:rPr>
               <a:t>T</a:t>
             </a:r>
             <a:r>
               <a:rPr lang="ru-RU" sz="1080" baseline="-25000">
-                <a:latin typeface="Roboto"/>
-                <a:ea typeface="Roboto"/>
-                <a:cs typeface="Roboto"/>
+                <a:latin typeface="Times New Roman"/>
+                <a:ea typeface="Times New Roman"/>
+                <a:cs typeface="Times New Roman"/>
               </a:rPr>
               <a:t>first_byte</a:t>
             </a:r>
             <a:r>
               <a:rPr lang="ru-RU" sz="1500">
-                <a:latin typeface="Roboto"/>
-                <a:ea typeface="Roboto"/>
-                <a:cs typeface="Roboto"/>
+                <a:latin typeface="Times New Roman"/>
+                <a:ea typeface="Times New Roman"/>
+                <a:cs typeface="Times New Roman"/>
               </a:rPr>
               <a:t> (lazy FUSE loading) &lt; 1 с</a:t>
             </a:r>
@@ -6087,9 +6087,9 @@
             </a:pPr>
             <a:r>
               <a:rPr lang="ru-RU" sz="1500">
-                <a:latin typeface="Roboto"/>
-                <a:ea typeface="Roboto"/>
-                <a:cs typeface="Roboto"/>
+                <a:latin typeface="Times New Roman"/>
+                <a:ea typeface="Times New Roman"/>
+                <a:cs typeface="Times New Roman"/>
               </a:rPr>
               <a:t>  •  Трафик N = 10 реплик = 1× размер модели</a:t>
             </a:r>
@@ -6106,9 +6106,9 @@
             </a:pPr>
             <a:r>
               <a:rPr lang="ru-RU" sz="1500">
-                <a:latin typeface="Roboto"/>
-                <a:ea typeface="Roboto"/>
-                <a:cs typeface="Roboto"/>
+                <a:latin typeface="Times New Roman"/>
+                <a:ea typeface="Times New Roman"/>
+                <a:cs typeface="Times New Roman"/>
               </a:rPr>
               <a:t>  •  Отказ worker-ноды → graceful degradation</a:t>
             </a:r>
@@ -6125,9 +6125,9 @@
             </a:pPr>
             <a:r>
               <a:rPr lang="ru-RU" sz="1500">
-                <a:latin typeface="Roboto"/>
-                <a:ea typeface="Roboto"/>
-                <a:cs typeface="Roboto"/>
+                <a:latin typeface="Times New Roman"/>
+                <a:ea typeface="Times New Roman"/>
+                <a:cs typeface="Times New Roman"/>
               </a:rPr>
               <a:t>  •  Overhead FUSE (посл. чтение) ≤ 0.5 % CPU</a:t>
             </a:r>
@@ -6144,9 +6144,9 @@
             </a:pPr>
             <a:r>
               <a:rPr lang="ru-RU" sz="1500">
-                <a:latin typeface="Roboto"/>
-                <a:ea typeface="Roboto"/>
-                <a:cs typeface="Roboto"/>
+                <a:latin typeface="Times New Roman"/>
+                <a:ea typeface="Times New Roman"/>
+                <a:cs typeface="Times New Roman"/>
               </a:rPr>
               <a:t>  •  Redis lookup latency p99 &lt; 5 мс</a:t>
             </a:r>
@@ -6212,9 +6212,9 @@
             </a:pPr>
             <a:r>
               <a:rPr lang="ru-RU" sz="2800" b="1">
-                <a:latin typeface="Roboto"/>
-                <a:ea typeface="Roboto"/>
-                <a:cs typeface="Roboto"/>
+                <a:latin typeface="Times New Roman"/>
+                <a:ea typeface="Times New Roman"/>
+                <a:cs typeface="Times New Roman"/>
               </a:rPr>
               <a:t>Стек технологий</a:t>
             </a:r>
@@ -6254,9 +6254,9 @@
             </a:pPr>
             <a:r>
               <a:rPr lang="ru-RU" sz="1800" b="1">
-                <a:latin typeface="Roboto"/>
-                <a:ea typeface="Roboto"/>
-                <a:cs typeface="Roboto"/>
+                <a:latin typeface="Times New Roman"/>
+                <a:ea typeface="Times New Roman"/>
+                <a:cs typeface="Times New Roman"/>
               </a:rPr>
               <a:t>Kubernetes</a:t>
             </a:r>
@@ -6276,9 +6276,9 @@
                 <a:solidFill>
                   <a:srgbClr val="424242"/>
                 </a:solidFill>
-                <a:latin typeface="Roboto"/>
-                <a:ea typeface="Roboto"/>
-                <a:cs typeface="Roboto"/>
+                <a:latin typeface="Times New Roman"/>
+                <a:ea typeface="Times New Roman"/>
+                <a:cs typeface="Times New Roman"/>
               </a:rPr>
               <a:t>   Оркестрация: DaemonSet для storage-agent; PVC, CSI-интеграция</a:t>
             </a:r>
@@ -6306,9 +6306,9 @@
             </a:pPr>
             <a:r>
               <a:rPr lang="ru-RU" sz="1800" b="1">
-                <a:latin typeface="Roboto"/>
-                <a:ea typeface="Roboto"/>
-                <a:cs typeface="Roboto"/>
+                <a:latin typeface="Times New Roman"/>
+                <a:ea typeface="Times New Roman"/>
+                <a:cs typeface="Times New Roman"/>
               </a:rPr>
               <a:t>Go</a:t>
             </a:r>
@@ -6328,9 +6328,9 @@
                 <a:solidFill>
                   <a:srgbClr val="424242"/>
                 </a:solidFill>
-                <a:latin typeface="Roboto"/>
-                <a:ea typeface="Roboto"/>
-                <a:cs typeface="Roboto"/>
+                <a:latin typeface="Times New Roman"/>
+                <a:ea typeface="Times New Roman"/>
+                <a:cs typeface="Times New Roman"/>
               </a:rPr>
               <a:t>   Реализация storage-agent и storage-mounter; библиотека go-fuse</a:t>
             </a:r>
@@ -6358,9 +6358,9 @@
             </a:pPr>
             <a:r>
               <a:rPr lang="ru-RU" sz="1800" b="1">
-                <a:latin typeface="Roboto"/>
-                <a:ea typeface="Roboto"/>
-                <a:cs typeface="Roboto"/>
+                <a:latin typeface="Times New Roman"/>
+                <a:ea typeface="Times New Roman"/>
+                <a:cs typeface="Times New Roman"/>
               </a:rPr>
               <a:t>Redis</a:t>
             </a:r>
@@ -6380,9 +6380,9 @@
                 <a:solidFill>
                   <a:srgbClr val="424242"/>
                 </a:solidFill>
-                <a:latin typeface="Roboto"/>
-                <a:ea typeface="Roboto"/>
-                <a:cs typeface="Roboto"/>
+                <a:latin typeface="Times New Roman"/>
+                <a:ea typeface="Times New Roman"/>
+                <a:cs typeface="Times New Roman"/>
               </a:rPr>
               <a:t>   Реестр метаданных чанков: TTL-записи, heartbeat агентов (Sentinel / Cluster)</a:t>
             </a:r>
@@ -6410,9 +6410,9 @@
             </a:pPr>
             <a:r>
               <a:rPr lang="ru-RU" sz="1800" b="1">
-                <a:latin typeface="Roboto"/>
-                <a:ea typeface="Roboto"/>
-                <a:cs typeface="Roboto"/>
+                <a:latin typeface="Times New Roman"/>
+                <a:ea typeface="Times New Roman"/>
+                <a:cs typeface="Times New Roman"/>
               </a:rPr>
               <a:t>FUSE (Linux)</a:t>
             </a:r>
@@ -6432,9 +6432,9 @@
                 <a:solidFill>
                   <a:srgbClr val="424242"/>
                 </a:solidFill>
-                <a:latin typeface="Roboto"/>
-                <a:ea typeface="Roboto"/>
-                <a:cs typeface="Roboto"/>
+                <a:latin typeface="Times New Roman"/>
+                <a:ea typeface="Times New Roman"/>
+                <a:cs typeface="Times New Roman"/>
               </a:rPr>
               <a:t>   Виртуальная ФС — ML-runtime видит обычные файлы без изменений кода</a:t>
             </a:r>
@@ -6462,9 +6462,9 @@
             </a:pPr>
             <a:r>
               <a:rPr lang="ru-RU" sz="1800" b="1">
-                <a:latin typeface="Roboto"/>
-                <a:ea typeface="Roboto"/>
-                <a:cs typeface="Roboto"/>
+                <a:latin typeface="Times New Roman"/>
+                <a:ea typeface="Times New Roman"/>
+                <a:cs typeface="Times New Roman"/>
               </a:rPr>
               <a:t>HuggingFace Hub</a:t>
             </a:r>
@@ -6484,9 +6484,9 @@
                 <a:solidFill>
                   <a:srgbClr val="424242"/>
                 </a:solidFill>
-                <a:latin typeface="Roboto"/>
-                <a:ea typeface="Roboto"/>
-                <a:cs typeface="Roboto"/>
+                <a:latin typeface="Times New Roman"/>
+                <a:ea typeface="Times New Roman"/>
+                <a:cs typeface="Times New Roman"/>
               </a:rPr>
               <a:t>   Внешний репозиторий весов; fallback-источник при отсутствии кэша</a:t>
             </a:r>
@@ -6514,9 +6514,9 @@
             </a:pPr>
             <a:r>
               <a:rPr lang="ru-RU" sz="1800" b="1">
-                <a:latin typeface="Roboto"/>
-                <a:ea typeface="Roboto"/>
-                <a:cs typeface="Roboto"/>
+                <a:latin typeface="Times New Roman"/>
+                <a:ea typeface="Times New Roman"/>
+                <a:cs typeface="Times New Roman"/>
               </a:rPr>
               <a:t>NFS  ·  Docker / containerd  ·  Prometheus + Grafana</a:t>
             </a:r>
@@ -6536,9 +6536,9 @@
                 <a:solidFill>
                   <a:srgbClr val="424242"/>
                 </a:solidFill>
-                <a:latin typeface="Roboto"/>
-                <a:ea typeface="Roboto"/>
-                <a:cs typeface="Roboto"/>
+                <a:latin typeface="Times New Roman"/>
+                <a:ea typeface="Times New Roman"/>
+                <a:cs typeface="Times New Roman"/>
               </a:rPr>
               <a:t>   Промежуточный этап с flock / Lease; контейнеризация; мониторинг hit rate и latency</a:t>
             </a:r>
@@ -6604,9 +6604,9 @@
             </a:pPr>
             <a:r>
               <a:rPr lang="ru-RU" sz="2800" b="1">
-                <a:latin typeface="Roboto"/>
-                <a:ea typeface="Roboto"/>
-                <a:cs typeface="Roboto"/>
+                <a:latin typeface="Times New Roman"/>
+                <a:ea typeface="Times New Roman"/>
+                <a:cs typeface="Times New Roman"/>
               </a:rPr>
               <a:t>Предложенная архитектура</a:t>
             </a:r>
@@ -6692,9 +6692,9 @@
                 <a:solidFill>
                   <a:srgbClr val="9E9E9E"/>
                 </a:solidFill>
-                <a:latin typeface="Roboto"/>
-                <a:ea typeface="Roboto"/>
-                <a:cs typeface="Roboto"/>
+                <a:latin typeface="Times New Roman"/>
+                <a:ea typeface="Times New Roman"/>
+                <a:cs typeface="Times New Roman"/>
               </a:rPr>
               <a:t>[ схема P2P / FUSE-архитектуры ]</a:t>
             </a:r>
@@ -6737,9 +6737,9 @@
                 <a:solidFill>
                   <a:srgbClr val="058DC7"/>
                 </a:solidFill>
-                <a:latin typeface="Roboto"/>
-                <a:ea typeface="Roboto"/>
-                <a:cs typeface="Roboto"/>
+                <a:latin typeface="Times New Roman"/>
+                <a:ea typeface="Times New Roman"/>
+                <a:cs typeface="Times New Roman"/>
               </a:rPr>
               <a:t>Redis Cluster</a:t>
             </a:r>
@@ -6756,9 +6756,9 @@
             </a:pPr>
             <a:r>
               <a:rPr lang="ru-RU" sz="1380">
-                <a:latin typeface="Roboto"/>
-                <a:ea typeface="Roboto"/>
-                <a:cs typeface="Roboto"/>
+                <a:latin typeface="Times New Roman"/>
+                <a:ea typeface="Times New Roman"/>
+                <a:cs typeface="Times New Roman"/>
               </a:rPr>
               <a:t>  Control Plane: реестр чанков + heartbeat (TTL 30 с)</a:t>
             </a:r>
@@ -6789,9 +6789,9 @@
                 <a:solidFill>
                   <a:srgbClr val="158158"/>
                 </a:solidFill>
-                <a:latin typeface="Roboto"/>
-                <a:ea typeface="Roboto"/>
-                <a:cs typeface="Roboto"/>
+                <a:latin typeface="Times New Roman"/>
+                <a:ea typeface="Times New Roman"/>
+                <a:cs typeface="Times New Roman"/>
               </a:rPr>
               <a:t>storage-agent</a:t>
             </a:r>
@@ -6808,9 +6808,9 @@
             </a:pPr>
             <a:r>
               <a:rPr lang="ru-RU" sz="1380">
-                <a:latin typeface="Roboto"/>
-                <a:ea typeface="Roboto"/>
-                <a:cs typeface="Roboto"/>
+                <a:latin typeface="Times New Roman"/>
+                <a:ea typeface="Times New Roman"/>
+                <a:cs typeface="Times New Roman"/>
               </a:rPr>
               <a:t>  DaemonSet · chunk-кэш NVMe</a:t>
             </a:r>
@@ -6827,9 +6827,9 @@
             </a:pPr>
             <a:r>
               <a:rPr lang="ru-RU" sz="1380">
-                <a:latin typeface="Roboto"/>
-                <a:ea typeface="Roboto"/>
-                <a:cs typeface="Roboto"/>
+                <a:latin typeface="Times New Roman"/>
+                <a:ea typeface="Times New Roman"/>
+                <a:cs typeface="Times New Roman"/>
               </a:rPr>
               <a:t>  UDS ← mounter   TCP ↔ пиры</a:t>
             </a:r>
@@ -6860,9 +6860,9 @@
                 <a:solidFill>
                   <a:srgbClr val="158158"/>
                 </a:solidFill>
-                <a:latin typeface="Roboto"/>
-                <a:ea typeface="Roboto"/>
-                <a:cs typeface="Roboto"/>
+                <a:latin typeface="Times New Roman"/>
+                <a:ea typeface="Times New Roman"/>
+                <a:cs typeface="Times New Roman"/>
               </a:rPr>
               <a:t>storage-mounter</a:t>
             </a:r>
@@ -6879,9 +6879,9 @@
             </a:pPr>
             <a:r>
               <a:rPr lang="ru-RU" sz="1380">
-                <a:latin typeface="Roboto"/>
-                <a:ea typeface="Roboto"/>
-                <a:cs typeface="Roboto"/>
+                <a:latin typeface="Times New Roman"/>
+                <a:ea typeface="Times New Roman"/>
+                <a:cs typeface="Times New Roman"/>
               </a:rPr>
               <a:t>  FUSE-ФС · lazy loading</a:t>
             </a:r>
@@ -6898,33 +6898,33 @@
             </a:pPr>
             <a:r>
               <a:rPr lang="ru-RU" sz="1380">
-                <a:latin typeface="Roboto"/>
-                <a:ea typeface="Roboto"/>
-                <a:cs typeface="Roboto"/>
+                <a:latin typeface="Times New Roman"/>
+                <a:ea typeface="Times New Roman"/>
+                <a:cs typeface="Times New Roman"/>
               </a:rPr>
               <a:t>  </a:t>
             </a:r>
             <a:r>
               <a:rPr lang="ru-RU" sz="1380" i="1">
-                <a:latin typeface="Roboto"/>
-                <a:ea typeface="Roboto"/>
-                <a:cs typeface="Roboto"/>
+                <a:latin typeface="Times New Roman"/>
+                <a:ea typeface="Times New Roman"/>
+                <a:cs typeface="Times New Roman"/>
               </a:rPr>
               <a:t>T</a:t>
             </a:r>
             <a:r>
               <a:rPr lang="ru-RU" sz="993" baseline="-25000">
-                <a:latin typeface="Roboto"/>
-                <a:ea typeface="Roboto"/>
-                <a:cs typeface="Roboto"/>
+                <a:latin typeface="Times New Roman"/>
+                <a:ea typeface="Times New Roman"/>
+                <a:cs typeface="Times New Roman"/>
               </a:rPr>
               <a:t>first_byte</a:t>
             </a:r>
             <a:r>
               <a:rPr lang="ru-RU" sz="1380">
-                <a:latin typeface="Roboto"/>
-                <a:ea typeface="Roboto"/>
-                <a:cs typeface="Roboto"/>
+                <a:latin typeface="Times New Roman"/>
+                <a:ea typeface="Times New Roman"/>
+                <a:cs typeface="Times New Roman"/>
               </a:rPr>
               <a:t> &lt; 1 с</a:t>
             </a:r>
@@ -6952,9 +6952,9 @@
             </a:pPr>
             <a:r>
               <a:rPr lang="ru-RU" sz="1500" b="1">
-                <a:latin typeface="Roboto"/>
-                <a:ea typeface="Roboto"/>
-                <a:cs typeface="Roboto"/>
+                <a:latin typeface="Times New Roman"/>
+                <a:ea typeface="Times New Roman"/>
+                <a:cs typeface="Times New Roman"/>
               </a:rPr>
               <a:t>Алгоритм чтения чанка:</a:t>
             </a:r>
@@ -6974,9 +6974,9 @@
                 <a:solidFill>
                   <a:srgbClr val="158158"/>
                 </a:solidFill>
-                <a:latin typeface="Roboto"/>
-                <a:ea typeface="Roboto"/>
-                <a:cs typeface="Roboto"/>
+                <a:latin typeface="Times New Roman"/>
+                <a:ea typeface="Times New Roman"/>
+                <a:cs typeface="Times New Roman"/>
               </a:rPr>
               <a:t>  1. Локальный NVMe    →  2.3 мс  ✓</a:t>
             </a:r>
@@ -6996,9 +6996,9 @@
                 <a:solidFill>
                   <a:srgbClr val="E68A00"/>
                 </a:solidFill>
-                <a:latin typeface="Roboto"/>
-                <a:ea typeface="Roboto"/>
-                <a:cs typeface="Roboto"/>
+                <a:latin typeface="Times New Roman"/>
+                <a:ea typeface="Times New Roman"/>
+                <a:cs typeface="Times New Roman"/>
               </a:rPr>
               <a:t>  2. Соседняя нода P2P →  13 мс</a:t>
             </a:r>
@@ -7018,9 +7018,9 @@
                 <a:solidFill>
                   <a:srgbClr val="C62828"/>
                 </a:solidFill>
-                <a:latin typeface="Roboto"/>
-                <a:ea typeface="Roboto"/>
-                <a:cs typeface="Roboto"/>
+                <a:latin typeface="Times New Roman"/>
+                <a:ea typeface="Times New Roman"/>
+                <a:cs typeface="Times New Roman"/>
               </a:rPr>
               <a:t>  3. HuggingFace Hub   →  130+ мс</a:t>
             </a:r>
@@ -7086,9 +7086,9 @@
             </a:pPr>
             <a:r>
               <a:rPr lang="ru-RU" sz="2800" b="1">
-                <a:latin typeface="Roboto"/>
-                <a:ea typeface="Roboto"/>
-                <a:cs typeface="Roboto"/>
+                <a:latin typeface="Times New Roman"/>
+                <a:ea typeface="Times New Roman"/>
+                <a:cs typeface="Times New Roman"/>
               </a:rPr>
               <a:t>Нагрузочное тестирование: стенд и сценарии</a:t>
             </a:r>
@@ -7128,9 +7128,9 @@
             </a:pPr>
             <a:r>
               <a:rPr lang="ru-RU" sz="1800" b="1">
-                <a:latin typeface="Roboto"/>
-                <a:ea typeface="Roboto"/>
-                <a:cs typeface="Roboto"/>
+                <a:latin typeface="Times New Roman"/>
+                <a:ea typeface="Times New Roman"/>
+                <a:cs typeface="Times New Roman"/>
               </a:rPr>
               <a:t>Тестовый стенд:</a:t>
             </a:r>
@@ -7158,9 +7158,9 @@
             </a:pPr>
             <a:r>
               <a:rPr lang="ru-RU" sz="1500">
-                <a:latin typeface="Roboto"/>
-                <a:ea typeface="Roboto"/>
-                <a:cs typeface="Roboto"/>
+                <a:latin typeface="Times New Roman"/>
+                <a:ea typeface="Times New Roman"/>
+                <a:cs typeface="Times New Roman"/>
               </a:rPr>
               <a:t>  •  6 worker-нод: Intel Xeon Silver, 16c/32t, 64 ГБ RAM</a:t>
             </a:r>
@@ -7177,9 +7177,9 @@
             </a:pPr>
             <a:r>
               <a:rPr lang="ru-RU" sz="1500">
-                <a:latin typeface="Roboto"/>
-                <a:ea typeface="Roboto"/>
-                <a:cs typeface="Roboto"/>
+                <a:latin typeface="Times New Roman"/>
+                <a:ea typeface="Times New Roman"/>
+                <a:cs typeface="Times New Roman"/>
               </a:rPr>
               <a:t>  •  Samsung 980 Pro NVMe 2 ТБ — seq. read 7 000 МБ/с</a:t>
             </a:r>
@@ -7196,9 +7196,9 @@
             </a:pPr>
             <a:r>
               <a:rPr lang="ru-RU" sz="1500">
-                <a:latin typeface="Roboto"/>
-                <a:ea typeface="Roboto"/>
-                <a:cs typeface="Roboto"/>
+                <a:latin typeface="Times New Roman"/>
+                <a:ea typeface="Times New Roman"/>
+                <a:cs typeface="Times New Roman"/>
               </a:rPr>
               <a:t>  •  Сеть: 10 Гбит/с Ethernet, RTT ≤ 0.5 мс</a:t>
             </a:r>
@@ -7215,9 +7215,9 @@
             </a:pPr>
             <a:r>
               <a:rPr lang="ru-RU" sz="1500">
-                <a:latin typeface="Roboto"/>
-                <a:ea typeface="Roboto"/>
-                <a:cs typeface="Roboto"/>
+                <a:latin typeface="Times New Roman"/>
+                <a:ea typeface="Times New Roman"/>
+                <a:cs typeface="Times New Roman"/>
               </a:rPr>
               <a:t>  •  Redis: 1 master + 2 replica (Sentinel)</a:t>
             </a:r>
@@ -7245,9 +7245,9 @@
             </a:pPr>
             <a:r>
               <a:rPr lang="ru-RU" sz="1800" b="1">
-                <a:latin typeface="Roboto"/>
-                <a:ea typeface="Roboto"/>
-                <a:cs typeface="Roboto"/>
+                <a:latin typeface="Times New Roman"/>
+                <a:ea typeface="Times New Roman"/>
+                <a:cs typeface="Times New Roman"/>
               </a:rPr>
               <a:t>Тестовые модели:</a:t>
             </a:r>
@@ -7275,11 +7275,11 @@
             </a:pPr>
             <a:r>
               <a:rPr lang="ru-RU" sz="1500">
-                <a:latin typeface="Roboto"/>
-                <a:ea typeface="Roboto"/>
-                <a:cs typeface="Roboto"/>
-              </a:rPr>
-              <a:t>  •  Llama 3 8B   —  15 ГБ,    960 чанков × 16 МБ</a:t>
+                <a:latin typeface="Times New Roman"/>
+                <a:ea typeface="Times New Roman"/>
+                <a:cs typeface="Times New Roman"/>
+              </a:rPr>
+              <a:t>  •  DeepSeek-LLM 7B   —  15 ГБ,    960 чанков × 16 МБ</a:t>
             </a:r>
           </a:p>
           <a:p>
@@ -7294,9 +7294,9 @@
             </a:pPr>
             <a:r>
               <a:rPr lang="ru-RU" sz="1500">
-                <a:latin typeface="Roboto"/>
-                <a:ea typeface="Roboto"/>
-                <a:cs typeface="Roboto"/>
+                <a:latin typeface="Times New Roman"/>
+                <a:ea typeface="Times New Roman"/>
+                <a:cs typeface="Times New Roman"/>
               </a:rPr>
               <a:t>  •  Mistral 7B   —  14 ГБ,    896 чанков × 16 МБ</a:t>
             </a:r>
@@ -7313,11 +7313,11 @@
             </a:pPr>
             <a:r>
               <a:rPr lang="ru-RU" sz="1500">
-                <a:latin typeface="Roboto"/>
-                <a:ea typeface="Roboto"/>
-                <a:cs typeface="Roboto"/>
-              </a:rPr>
-              <a:t>  •  Llama 3 70B  —  140 ГБ,  8 960 чанков × 16 МБ</a:t>
+                <a:latin typeface="Times New Roman"/>
+                <a:ea typeface="Times New Roman"/>
+                <a:cs typeface="Times New Roman"/>
+              </a:rPr>
+              <a:t>  •  DeepSeek-LLM 67B  —  140 ГБ,  8 960 чанков × 16 МБ</a:t>
             </a:r>
           </a:p>
         </p:txBody>
@@ -7355,9 +7355,9 @@
             </a:pPr>
             <a:r>
               <a:rPr lang="ru-RU" sz="1800" b="1">
-                <a:latin typeface="Roboto"/>
-                <a:ea typeface="Roboto"/>
-                <a:cs typeface="Roboto"/>
+                <a:latin typeface="Times New Roman"/>
+                <a:ea typeface="Times New Roman"/>
+                <a:cs typeface="Times New Roman"/>
               </a:rPr>
               <a:t>Сценарии:</a:t>
             </a:r>
@@ -7385,9 +7385,9 @@
             </a:pPr>
             <a:r>
               <a:rPr lang="ru-RU" sz="1500">
-                <a:latin typeface="Roboto"/>
-                <a:ea typeface="Roboto"/>
-                <a:cs typeface="Roboto"/>
+                <a:latin typeface="Times New Roman"/>
+                <a:ea typeface="Times New Roman"/>
+                <a:cs typeface="Times New Roman"/>
               </a:rPr>
               <a:t>  1.  Cold cluster — кэш пуст, Redis пуст</a:t>
             </a:r>
@@ -7407,9 +7407,9 @@
                 <a:solidFill>
                   <a:srgbClr val="424242"/>
                 </a:solidFill>
-                <a:latin typeface="Roboto"/>
-                <a:ea typeface="Roboto"/>
-                <a:cs typeface="Roboto"/>
+                <a:latin typeface="Times New Roman"/>
+                <a:ea typeface="Times New Roman"/>
+                <a:cs typeface="Times New Roman"/>
               </a:rPr>
               <a:t>       первый запуск в кластере</a:t>
             </a:r>
@@ -7437,9 +7437,9 @@
             </a:pPr>
             <a:r>
               <a:rPr lang="ru-RU" sz="1500">
-                <a:latin typeface="Roboto"/>
-                <a:ea typeface="Roboto"/>
-                <a:cs typeface="Roboto"/>
+                <a:latin typeface="Times New Roman"/>
+                <a:ea typeface="Times New Roman"/>
+                <a:cs typeface="Times New Roman"/>
               </a:rPr>
               <a:t>  2.  Warm (same node) — local cache hit</a:t>
             </a:r>
@@ -7459,9 +7459,9 @@
                 <a:solidFill>
                   <a:srgbClr val="424242"/>
                 </a:solidFill>
-                <a:latin typeface="Roboto"/>
-                <a:ea typeface="Roboto"/>
-                <a:cs typeface="Roboto"/>
+                <a:latin typeface="Times New Roman"/>
+                <a:ea typeface="Times New Roman"/>
+                <a:cs typeface="Times New Roman"/>
               </a:rPr>
               <a:t>       модель уже есть на той же ноде</a:t>
             </a:r>
@@ -7489,9 +7489,9 @@
             </a:pPr>
             <a:r>
               <a:rPr lang="ru-RU" sz="1500">
-                <a:latin typeface="Roboto"/>
-                <a:ea typeface="Roboto"/>
-                <a:cs typeface="Roboto"/>
+                <a:latin typeface="Times New Roman"/>
+                <a:ea typeface="Times New Roman"/>
+                <a:cs typeface="Times New Roman"/>
               </a:rPr>
               <a:t>  3.  Warm (peer node) — P2P peer cache hit</a:t>
             </a:r>
@@ -7511,9 +7511,9 @@
                 <a:solidFill>
                   <a:srgbClr val="424242"/>
                 </a:solidFill>
-                <a:latin typeface="Roboto"/>
-                <a:ea typeface="Roboto"/>
-                <a:cs typeface="Roboto"/>
+                <a:latin typeface="Times New Roman"/>
+                <a:ea typeface="Times New Roman"/>
+                <a:cs typeface="Times New Roman"/>
               </a:rPr>
               <a:t>       модель есть на соседней ноде</a:t>
             </a:r>
@@ -7541,9 +7541,9 @@
             </a:pPr>
             <a:r>
               <a:rPr lang="ru-RU" sz="1500">
-                <a:latin typeface="Roboto"/>
-                <a:ea typeface="Roboto"/>
-                <a:cs typeface="Roboto"/>
+                <a:latin typeface="Times New Roman"/>
+                <a:ea typeface="Times New Roman"/>
+                <a:cs typeface="Times New Roman"/>
               </a:rPr>
               <a:t>  4.  Burst ×10 — 10 подов одновременно</a:t>
             </a:r>
@@ -7563,9 +7563,9 @@
                 <a:solidFill>
                   <a:srgbClr val="424242"/>
                 </a:solidFill>
-                <a:latin typeface="Roboto"/>
-                <a:ea typeface="Roboto"/>
-                <a:cs typeface="Roboto"/>
+                <a:latin typeface="Times New Roman"/>
+                <a:ea typeface="Times New Roman"/>
+                <a:cs typeface="Times New Roman"/>
               </a:rPr>
               <a:t>       суммарный трафик и p99 по репликам</a:t>
             </a:r>
@@ -7596,9 +7596,9 @@
                 <a:solidFill>
                   <a:srgbClr val="424242"/>
                 </a:solidFill>
-                <a:latin typeface="Roboto"/>
-                <a:ea typeface="Roboto"/>
-                <a:cs typeface="Roboto"/>
+                <a:latin typeface="Times New Roman"/>
+                <a:ea typeface="Times New Roman"/>
+                <a:cs typeface="Times New Roman"/>
               </a:rPr>
               <a:t>Метрики: </a:t>
             </a:r>
@@ -7607,9 +7607,9 @@
                 <a:solidFill>
                   <a:srgbClr val="424242"/>
                 </a:solidFill>
-                <a:latin typeface="Roboto"/>
-                <a:ea typeface="Roboto"/>
-                <a:cs typeface="Roboto"/>
+                <a:latin typeface="Times New Roman"/>
+                <a:ea typeface="Times New Roman"/>
+                <a:cs typeface="Times New Roman"/>
               </a:rPr>
               <a:t>T</a:t>
             </a:r>
@@ -7618,9 +7618,9 @@
                 <a:solidFill>
                   <a:srgbClr val="424242"/>
                 </a:solidFill>
-                <a:latin typeface="Roboto"/>
-                <a:ea typeface="Roboto"/>
-                <a:cs typeface="Roboto"/>
+                <a:latin typeface="Times New Roman"/>
+                <a:ea typeface="Times New Roman"/>
+                <a:cs typeface="Times New Roman"/>
               </a:rPr>
               <a:t>model_ready</a:t>
             </a:r>
@@ -7629,9 +7629,9 @@
                 <a:solidFill>
                   <a:srgbClr val="424242"/>
                 </a:solidFill>
-                <a:latin typeface="Roboto"/>
-                <a:ea typeface="Roboto"/>
-                <a:cs typeface="Roboto"/>
+                <a:latin typeface="Times New Roman"/>
+                <a:ea typeface="Times New Roman"/>
+                <a:cs typeface="Times New Roman"/>
               </a:rPr>
               <a:t> (p50/p99)  ·  </a:t>
             </a:r>
@@ -7640,9 +7640,9 @@
                 <a:solidFill>
                   <a:srgbClr val="424242"/>
                 </a:solidFill>
-                <a:latin typeface="Roboto"/>
-                <a:ea typeface="Roboto"/>
-                <a:cs typeface="Roboto"/>
+                <a:latin typeface="Times New Roman"/>
+                <a:ea typeface="Times New Roman"/>
+                <a:cs typeface="Times New Roman"/>
               </a:rPr>
               <a:t>T</a:t>
             </a:r>
@@ -7651,9 +7651,9 @@
                 <a:solidFill>
                   <a:srgbClr val="424242"/>
                 </a:solidFill>
-                <a:latin typeface="Roboto"/>
-                <a:ea typeface="Roboto"/>
-                <a:cs typeface="Roboto"/>
+                <a:latin typeface="Times New Roman"/>
+                <a:ea typeface="Times New Roman"/>
+                <a:cs typeface="Times New Roman"/>
               </a:rPr>
               <a:t>first_byte</a:t>
             </a:r>
@@ -7662,9 +7662,9 @@
                 <a:solidFill>
                   <a:srgbClr val="424242"/>
                 </a:solidFill>
-                <a:latin typeface="Roboto"/>
-                <a:ea typeface="Roboto"/>
-                <a:cs typeface="Roboto"/>
+                <a:latin typeface="Times New Roman"/>
+                <a:ea typeface="Times New Roman"/>
+                <a:cs typeface="Times New Roman"/>
               </a:rPr>
               <a:t>  ·  </a:t>
             </a:r>
@@ -7673,9 +7673,9 @@
                 <a:solidFill>
                   <a:srgbClr val="424242"/>
                 </a:solidFill>
-                <a:latin typeface="Roboto"/>
-                <a:ea typeface="Roboto"/>
-                <a:cs typeface="Roboto"/>
+                <a:latin typeface="Times New Roman"/>
+                <a:ea typeface="Times New Roman"/>
+                <a:cs typeface="Times New Roman"/>
               </a:rPr>
               <a:t>V</a:t>
             </a:r>
@@ -7684,9 +7684,9 @@
                 <a:solidFill>
                   <a:srgbClr val="424242"/>
                 </a:solidFill>
-                <a:latin typeface="Roboto"/>
-                <a:ea typeface="Roboto"/>
-                <a:cs typeface="Roboto"/>
+                <a:latin typeface="Times New Roman"/>
+                <a:ea typeface="Times New Roman"/>
+                <a:cs typeface="Times New Roman"/>
               </a:rPr>
               <a:t>ext</a:t>
             </a:r>
@@ -7695,9 +7695,9 @@
                 <a:solidFill>
                   <a:srgbClr val="424242"/>
                 </a:solidFill>
-                <a:latin typeface="Roboto"/>
-                <a:ea typeface="Roboto"/>
-                <a:cs typeface="Roboto"/>
+                <a:latin typeface="Times New Roman"/>
+                <a:ea typeface="Times New Roman"/>
+                <a:cs typeface="Times New Roman"/>
               </a:rPr>
               <a:t>  ·  Redis p99  ·  CPU FUSE</a:t>
             </a:r>
@@ -7763,9 +7763,9 @@
             </a:pPr>
             <a:r>
               <a:rPr lang="ru-RU" sz="2800" b="1">
-                <a:latin typeface="Roboto"/>
-                <a:ea typeface="Roboto"/>
-                <a:cs typeface="Roboto"/>
+                <a:latin typeface="Times New Roman"/>
+                <a:ea typeface="Times New Roman"/>
+                <a:cs typeface="Times New Roman"/>
               </a:rPr>
               <a:t>Результаты тестирования</a:t>
             </a:r>
@@ -7808,7 +7808,7 @@
                           <a:solidFill>
                             <a:srgbClr val="FFFFFF"/>
                           </a:solidFill>
-                          <a:latin typeface="Roboto"/>
+                          <a:latin typeface="Times New Roman"/>
                         </a:rPr>
                         <a:t>Показатель</a:t>
                       </a:r>
@@ -7831,7 +7831,7 @@
                           <a:solidFill>
                             <a:srgbClr val="FFFFFF"/>
                           </a:solidFill>
-                          <a:latin typeface="Roboto"/>
+                          <a:latin typeface="Times New Roman"/>
                         </a:rPr>
                         <a:t>emptyDir (baseline)</a:t>
                       </a:r>
@@ -7854,7 +7854,7 @@
                           <a:solidFill>
                             <a:srgbClr val="FFFFFF"/>
                           </a:solidFill>
-                          <a:latin typeface="Roboto"/>
+                          <a:latin typeface="Times New Roman"/>
                         </a:rPr>
                         <a:t>NFS</a:t>
                       </a:r>
@@ -7877,7 +7877,7 @@
                           <a:solidFill>
                             <a:srgbClr val="FFFFFF"/>
                           </a:solidFill>
-                          <a:latin typeface="Roboto"/>
+                          <a:latin typeface="Times New Roman"/>
                         </a:rPr>
                         <a:t>P2P + FUSE</a:t>
                       </a:r>
@@ -7902,7 +7902,7 @@
                           <a:solidFill>
                             <a:srgbClr val="000000"/>
                           </a:solidFill>
-                          <a:latin typeface="Roboto"/>
+                          <a:latin typeface="Times New Roman"/>
                         </a:rPr>
                         <a:t>T_model_ready,  cold cluster</a:t>
                       </a:r>
@@ -7925,7 +7925,7 @@
                           <a:solidFill>
                             <a:srgbClr val="000000"/>
                           </a:solidFill>
-                          <a:latin typeface="Roboto"/>
+                          <a:latin typeface="Times New Roman"/>
                         </a:rPr>
                         <a:t>~74.8 с</a:t>
                       </a:r>
@@ -7948,7 +7948,7 @@
                           <a:solidFill>
                             <a:srgbClr val="000000"/>
                           </a:solidFill>
-                          <a:latin typeface="Roboto"/>
+                          <a:latin typeface="Times New Roman"/>
                         </a:rPr>
                         <a:t>~74.2 с</a:t>
                       </a:r>
@@ -7971,7 +7971,7 @@
                           <a:solidFill>
                             <a:srgbClr val="000000"/>
                           </a:solidFill>
-                          <a:latin typeface="Roboto"/>
+                          <a:latin typeface="Times New Roman"/>
                         </a:rPr>
                         <a:t>~74.5 с</a:t>
                       </a:r>
@@ -7996,7 +7996,7 @@
                           <a:solidFill>
                             <a:srgbClr val="000000"/>
                           </a:solidFill>
-                          <a:latin typeface="Roboto"/>
+                          <a:latin typeface="Times New Roman"/>
                         </a:rPr>
                         <a:t>T_model_ready,  warm (same node)</a:t>
                       </a:r>
@@ -8019,7 +8019,7 @@
                           <a:solidFill>
                             <a:srgbClr val="000000"/>
                           </a:solidFill>
-                          <a:latin typeface="Roboto"/>
+                          <a:latin typeface="Times New Roman"/>
                         </a:rPr>
                         <a:t>~74.8 с</a:t>
                       </a:r>
@@ -8042,7 +8042,7 @@
                           <a:solidFill>
                             <a:srgbClr val="000000"/>
                           </a:solidFill>
-                          <a:latin typeface="Roboto"/>
+                          <a:latin typeface="Times New Roman"/>
                         </a:rPr>
                         <a:t>~11.7 с</a:t>
                       </a:r>
@@ -8065,7 +8065,7 @@
                           <a:solidFill>
                             <a:srgbClr val="000000"/>
                           </a:solidFill>
-                          <a:latin typeface="Roboto"/>
+                          <a:latin typeface="Times New Roman"/>
                         </a:rPr>
                         <a:t>~1.9 с  ✓</a:t>
                       </a:r>
@@ -8090,7 +8090,7 @@
                           <a:solidFill>
                             <a:srgbClr val="000000"/>
                           </a:solidFill>
-                          <a:latin typeface="Roboto"/>
+                          <a:latin typeface="Times New Roman"/>
                         </a:rPr>
                         <a:t>T_model_ready,  warm (peer node)</a:t>
                       </a:r>
@@ -8113,7 +8113,7 @@
                           <a:solidFill>
                             <a:srgbClr val="000000"/>
                           </a:solidFill>
-                          <a:latin typeface="Roboto"/>
+                          <a:latin typeface="Times New Roman"/>
                         </a:rPr>
                         <a:t>~74.8 с</a:t>
                       </a:r>
@@ -8136,7 +8136,7 @@
                           <a:solidFill>
                             <a:srgbClr val="000000"/>
                           </a:solidFill>
-                          <a:latin typeface="Roboto"/>
+                          <a:latin typeface="Times New Roman"/>
                         </a:rPr>
                         <a:t>~11.7 с</a:t>
                       </a:r>
@@ -8159,7 +8159,7 @@
                           <a:solidFill>
                             <a:srgbClr val="000000"/>
                           </a:solidFill>
-                          <a:latin typeface="Roboto"/>
+                          <a:latin typeface="Times New Roman"/>
                         </a:rPr>
                         <a:t>~13.1 с  ✓</a:t>
                       </a:r>
@@ -8184,7 +8184,7 @@
                           <a:solidFill>
                             <a:srgbClr val="000000"/>
                           </a:solidFill>
-                          <a:latin typeface="Roboto"/>
+                          <a:latin typeface="Times New Roman"/>
                         </a:rPr>
                         <a:t>T_first_byte</a:t>
                       </a:r>
@@ -8207,7 +8207,7 @@
                           <a:solidFill>
                             <a:srgbClr val="000000"/>
                           </a:solidFill>
-                          <a:latin typeface="Roboto"/>
+                          <a:latin typeface="Times New Roman"/>
                         </a:rPr>
                         <a:t>~74.8 с</a:t>
                       </a:r>
@@ -8230,7 +8230,7 @@
                           <a:solidFill>
                             <a:srgbClr val="000000"/>
                           </a:solidFill>
-                          <a:latin typeface="Roboto"/>
+                          <a:latin typeface="Times New Roman"/>
                         </a:rPr>
                         <a:t>~74.2 с</a:t>
                       </a:r>
@@ -8253,7 +8253,7 @@
                           <a:solidFill>
                             <a:srgbClr val="000000"/>
                           </a:solidFill>
-                          <a:latin typeface="Roboto"/>
+                          <a:latin typeface="Times New Roman"/>
                         </a:rPr>
                         <a:t>&lt; 1 с  ✓</a:t>
                       </a:r>
@@ -8278,7 +8278,7 @@
                           <a:solidFill>
                             <a:srgbClr val="000000"/>
                           </a:solidFill>
-                          <a:latin typeface="Roboto"/>
+                          <a:latin typeface="Times New Roman"/>
                         </a:rPr>
                         <a:t>Внешний трафик,  N = 10 реплик</a:t>
                       </a:r>
@@ -8301,7 +8301,7 @@
                           <a:solidFill>
                             <a:srgbClr val="000000"/>
                           </a:solidFill>
-                          <a:latin typeface="Roboto"/>
+                          <a:latin typeface="Times New Roman"/>
                         </a:rPr>
                         <a:t>150 ГБ</a:t>
                       </a:r>
@@ -8324,7 +8324,7 @@
                           <a:solidFill>
                             <a:srgbClr val="000000"/>
                           </a:solidFill>
-                          <a:latin typeface="Roboto"/>
+                          <a:latin typeface="Times New Roman"/>
                         </a:rPr>
                         <a:t>15 ГБ</a:t>
                       </a:r>
@@ -8347,7 +8347,7 @@
                           <a:solidFill>
                             <a:srgbClr val="000000"/>
                           </a:solidFill>
-                          <a:latin typeface="Roboto"/>
+                          <a:latin typeface="Times New Roman"/>
                         </a:rPr>
                         <a:t>15 ГБ  ✓</a:t>
                       </a:r>
@@ -8372,7 +8372,7 @@
                           <a:solidFill>
                             <a:srgbClr val="000000"/>
                           </a:solidFill>
-                          <a:latin typeface="Roboto"/>
+                          <a:latin typeface="Times New Roman"/>
                         </a:rPr>
                         <a:t>SPOF</a:t>
                       </a:r>
@@ -8395,7 +8395,7 @@
                           <a:solidFill>
                             <a:srgbClr val="000000"/>
                           </a:solidFill>
-                          <a:latin typeface="Roboto"/>
+                          <a:latin typeface="Times New Roman"/>
                         </a:rPr>
                         <a:t>нет</a:t>
                       </a:r>
@@ -8418,7 +8418,7 @@
                           <a:solidFill>
                             <a:srgbClr val="000000"/>
                           </a:solidFill>
-                          <a:latin typeface="Roboto"/>
+                          <a:latin typeface="Times New Roman"/>
                         </a:rPr>
                         <a:t>NFS-сервер</a:t>
                       </a:r>
@@ -8441,7 +8441,7 @@
                           <a:solidFill>
                             <a:srgbClr val="000000"/>
                           </a:solidFill>
-                          <a:latin typeface="Roboto"/>
+                          <a:latin typeface="Times New Roman"/>
                         </a:rPr>
                         <a:t>Redis (HA → нет)</a:t>
                       </a:r>
